--- a/public/lessons/year-6-maths/summer/week-27/plot-points-in-four-quadrants/teaching-powerpoint-v1.pptx
+++ b/public/lessons/year-6-maths/summer/week-27/plot-points-in-four-quadrants/teaching-powerpoint-v1.pptx
@@ -2,24 +2,24 @@
 <file path=ppt/presentation.xml><?xml version="1.0" encoding="utf-8"?>
 <p:presentation xmlns:p="http://schemas.openxmlformats.org/presentationml/2006/main">
   <p:sldMasterIdLst>
-    <p:sldMasterId xmlns:r="http://schemas.openxmlformats.org/officeDocument/2006/relationships" id="2147483648" r:id="R09f202c1f66f47b6"/>
+    <p:sldMasterId xmlns:r="http://schemas.openxmlformats.org/officeDocument/2006/relationships" id="2147483648" r:id="Ra93d07b7ebc94aaa"/>
   </p:sldMasterIdLst>
   <p:notesMasterIdLst>
-    <p:notesMasterId xmlns:r="http://schemas.openxmlformats.org/officeDocument/2006/relationships" r:id="R5d5bee752c2f4dbc"/>
+    <p:notesMasterId xmlns:r="http://schemas.openxmlformats.org/officeDocument/2006/relationships" r:id="R2d31a218f70a4e16"/>
   </p:notesMasterIdLst>
   <p:sldIdLst>
-    <p:sldId xmlns:r="http://schemas.openxmlformats.org/officeDocument/2006/relationships" id="256" r:id="Ra60ec343c1354507"/>
-    <p:sldId xmlns:r="http://schemas.openxmlformats.org/officeDocument/2006/relationships" id="257" r:id="R7343c311fc274ab4"/>
-    <p:sldId xmlns:r="http://schemas.openxmlformats.org/officeDocument/2006/relationships" id="258" r:id="R8d38950687b24eb5"/>
-    <p:sldId xmlns:r="http://schemas.openxmlformats.org/officeDocument/2006/relationships" id="259" r:id="R91f0c44eba664e1c"/>
-    <p:sldId xmlns:r="http://schemas.openxmlformats.org/officeDocument/2006/relationships" id="260" r:id="R5e6483e7d8f74db3"/>
-    <p:sldId xmlns:r="http://schemas.openxmlformats.org/officeDocument/2006/relationships" id="261" r:id="Rad3d405478c4438a"/>
-    <p:sldId xmlns:r="http://schemas.openxmlformats.org/officeDocument/2006/relationships" id="262" r:id="R34f3084b59ca490e"/>
-    <p:sldId xmlns:r="http://schemas.openxmlformats.org/officeDocument/2006/relationships" id="263" r:id="R7d2c1a871d874099"/>
-    <p:sldId xmlns:r="http://schemas.openxmlformats.org/officeDocument/2006/relationships" id="264" r:id="R328e6faf44f14a02"/>
-    <p:sldId xmlns:r="http://schemas.openxmlformats.org/officeDocument/2006/relationships" id="265" r:id="Rf6b20457bc26462e"/>
-    <p:sldId xmlns:r="http://schemas.openxmlformats.org/officeDocument/2006/relationships" id="266" r:id="R75a08cae9bf84ab4"/>
-    <p:sldId xmlns:r="http://schemas.openxmlformats.org/officeDocument/2006/relationships" id="267" r:id="Rfb3f922a39dd4dd3"/>
+    <p:sldId xmlns:r="http://schemas.openxmlformats.org/officeDocument/2006/relationships" id="256" r:id="R5177f3396952453a"/>
+    <p:sldId xmlns:r="http://schemas.openxmlformats.org/officeDocument/2006/relationships" id="257" r:id="R691be8bcfacc4807"/>
+    <p:sldId xmlns:r="http://schemas.openxmlformats.org/officeDocument/2006/relationships" id="258" r:id="R97f571eb89424425"/>
+    <p:sldId xmlns:r="http://schemas.openxmlformats.org/officeDocument/2006/relationships" id="259" r:id="R4382cee841504c04"/>
+    <p:sldId xmlns:r="http://schemas.openxmlformats.org/officeDocument/2006/relationships" id="260" r:id="R0b484a37891e413b"/>
+    <p:sldId xmlns:r="http://schemas.openxmlformats.org/officeDocument/2006/relationships" id="261" r:id="Re2d99546557541fd"/>
+    <p:sldId xmlns:r="http://schemas.openxmlformats.org/officeDocument/2006/relationships" id="262" r:id="Rb8b504fe68084f34"/>
+    <p:sldId xmlns:r="http://schemas.openxmlformats.org/officeDocument/2006/relationships" id="263" r:id="Rfa0c1845c7a545f7"/>
+    <p:sldId xmlns:r="http://schemas.openxmlformats.org/officeDocument/2006/relationships" id="264" r:id="R0f5100f8c7a14238"/>
+    <p:sldId xmlns:r="http://schemas.openxmlformats.org/officeDocument/2006/relationships" id="265" r:id="R50c743d5fe85420f"/>
+    <p:sldId xmlns:r="http://schemas.openxmlformats.org/officeDocument/2006/relationships" id="266" r:id="Re89732f74598410a"/>
+    <p:sldId xmlns:r="http://schemas.openxmlformats.org/officeDocument/2006/relationships" id="267" r:id="Rdd355640ebcc4d77"/>
   </p:sldIdLst>
   <p:sldSz cx="12192000" cy="6858000"/>
   <p:notesSz cx="6858000" cy="9144000"/>
@@ -873,7 +873,7 @@
           <a:lstStyle xmlns:a="http://schemas.openxmlformats.org/drawingml/2006/main"/>
           <a:p xmlns:a="http://schemas.openxmlformats.org/drawingml/2006/main">
             <a:r>
-              <a:t>I do. Reveal the question, setup and each calculation stage one click at a time. Pupils watch before copying. Model answer: Quadrant II.</a:t>
+              <a:t>I do. Reveal the question, then reveal each mathematical change one click at a time. Point to the numbers and operation that changed before moving to the next line. Final answer: Quadrant II.</a:t>
             </a:r>
           </a:p>
         </p:txBody>
@@ -1291,7 +1291,7 @@
   </p:cSld>
   <p:clrMap bg1="lt1" tx1="dk1" bg2="lt2" tx2="dk2" accent1="accent1" accent2="accent2" accent3="accent3" accent4="accent4" accent5="accent5" accent6="accent6" hlink="hlink" folHlink="folHlink"/>
   <p:sldLayoutIdLst>
-    <p:sldLayoutId xmlns:r="http://schemas.openxmlformats.org/officeDocument/2006/relationships" id="2147483649" r:id="R06046565b6884b96"/>
+    <p:sldLayoutId xmlns:r="http://schemas.openxmlformats.org/officeDocument/2006/relationships" id="2147483649" r:id="R2427cbded22d478f"/>
   </p:sldLayoutIdLst>
   <p:txStyles>
     <p:titleStyle>
@@ -1842,7 +1842,7 @@
           <p:cNvPr id="12" name="">
             <a:extLst xmlns:a="http://schemas.openxmlformats.org/drawingml/2006/main">
               <a:ext uri="{FF2B5EF4-FFF2-40B4-BE49-F238E27FC236}">
-                <a16:creationId xmlns:a16="http://schemas.microsoft.com/office/drawing/2014/main" id="{306DDE1E-07FB-44BE-B74B-1CDAEB237C1B}"/>
+                <a16:creationId xmlns:a16="http://schemas.microsoft.com/office/drawing/2014/main" id="{969A7B43-6631-4D9A-938C-DF66EB8FE7F4}"/>
               </a:ext>
             </a:extLst>
           </p:cNvPr>
@@ -1874,7 +1874,7 @@
           <p:cNvPr id="2" name="">
             <a:extLst xmlns:a="http://schemas.openxmlformats.org/drawingml/2006/main">
               <a:ext uri="{FF2B5EF4-FFF2-40B4-BE49-F238E27FC236}">
-                <a16:creationId xmlns:a16="http://schemas.microsoft.com/office/drawing/2014/main" id="{41B88ADD-773C-494E-9C9C-1D52D757F3AA}"/>
+                <a16:creationId xmlns:a16="http://schemas.microsoft.com/office/drawing/2014/main" id="{41DC23E6-46B8-4AC0-B107-58B7072AAD74}"/>
               </a:ext>
             </a:extLst>
           </p:cNvPr>
@@ -1931,7 +1931,7 @@
           <p:cNvPr id="3" name="">
             <a:extLst xmlns:a="http://schemas.openxmlformats.org/drawingml/2006/main">
               <a:ext uri="{FF2B5EF4-FFF2-40B4-BE49-F238E27FC236}">
-                <a16:creationId xmlns:a16="http://schemas.microsoft.com/office/drawing/2014/main" id="{5AC8678D-F025-4543-AA79-0B4F65F12F5E}"/>
+                <a16:creationId xmlns:a16="http://schemas.microsoft.com/office/drawing/2014/main" id="{3E76C803-475A-40D6-BD23-3896AC0CFE2B}"/>
               </a:ext>
             </a:extLst>
           </p:cNvPr>
@@ -1965,7 +1965,7 @@
           <p:cNvPr id="4" name="">
             <a:extLst xmlns:a="http://schemas.openxmlformats.org/drawingml/2006/main">
               <a:ext uri="{FF2B5EF4-FFF2-40B4-BE49-F238E27FC236}">
-                <a16:creationId xmlns:a16="http://schemas.microsoft.com/office/drawing/2014/main" id="{312CC931-E8D6-4DB0-A744-9AD5918E8783}"/>
+                <a16:creationId xmlns:a16="http://schemas.microsoft.com/office/drawing/2014/main" id="{5967CD95-9377-4BC2-855A-FE15621742CA}"/>
               </a:ext>
             </a:extLst>
           </p:cNvPr>
@@ -2022,7 +2022,7 @@
           <p:cNvPr id="5" name="">
             <a:extLst xmlns:a="http://schemas.openxmlformats.org/drawingml/2006/main">
               <a:ext uri="{FF2B5EF4-FFF2-40B4-BE49-F238E27FC236}">
-                <a16:creationId xmlns:a16="http://schemas.microsoft.com/office/drawing/2014/main" id="{F644CB00-D7C3-4126-8E4C-E97A02B4D329}"/>
+                <a16:creationId xmlns:a16="http://schemas.microsoft.com/office/drawing/2014/main" id="{C440AD57-3593-4AB8-A879-96ACF7C7B422}"/>
               </a:ext>
             </a:extLst>
           </p:cNvPr>
@@ -2079,7 +2079,7 @@
           <p:cNvPr id="6" name="">
             <a:extLst xmlns:a="http://schemas.openxmlformats.org/drawingml/2006/main">
               <a:ext uri="{FF2B5EF4-FFF2-40B4-BE49-F238E27FC236}">
-                <a16:creationId xmlns:a16="http://schemas.microsoft.com/office/drawing/2014/main" id="{D53F53DB-A014-4A97-913F-86199241A22D}"/>
+                <a16:creationId xmlns:a16="http://schemas.microsoft.com/office/drawing/2014/main" id="{29967BDC-2793-4188-A89F-12D2F247E40C}"/>
               </a:ext>
             </a:extLst>
           </p:cNvPr>
@@ -2113,7 +2113,7 @@
           <p:cNvPr id="7" name="">
             <a:extLst xmlns:a="http://schemas.openxmlformats.org/drawingml/2006/main">
               <a:ext uri="{FF2B5EF4-FFF2-40B4-BE49-F238E27FC236}">
-                <a16:creationId xmlns:a16="http://schemas.microsoft.com/office/drawing/2014/main" id="{03EF80FD-9B71-4D8D-A858-8011DF8B1792}"/>
+                <a16:creationId xmlns:a16="http://schemas.microsoft.com/office/drawing/2014/main" id="{6BEF0C18-478B-4078-B601-C10FCA3C7A61}"/>
               </a:ext>
             </a:extLst>
           </p:cNvPr>
@@ -2170,7 +2170,7 @@
           <p:cNvPr id="8" name="">
             <a:extLst xmlns:a="http://schemas.openxmlformats.org/drawingml/2006/main">
               <a:ext uri="{FF2B5EF4-FFF2-40B4-BE49-F238E27FC236}">
-                <a16:creationId xmlns:a16="http://schemas.microsoft.com/office/drawing/2014/main" id="{18D26388-D3DD-4DE9-8742-392F6BB0E118}"/>
+                <a16:creationId xmlns:a16="http://schemas.microsoft.com/office/drawing/2014/main" id="{DE43FBA7-3979-4F52-B24B-5EC1892486D8}"/>
               </a:ext>
             </a:extLst>
           </p:cNvPr>
@@ -2227,7 +2227,7 @@
           <p:cNvPr id="9" name="">
             <a:extLst xmlns:a="http://schemas.openxmlformats.org/drawingml/2006/main">
               <a:ext uri="{FF2B5EF4-FFF2-40B4-BE49-F238E27FC236}">
-                <a16:creationId xmlns:a16="http://schemas.microsoft.com/office/drawing/2014/main" id="{E9FE88FF-8292-4AF8-8674-0FD3D7DA1C35}"/>
+                <a16:creationId xmlns:a16="http://schemas.microsoft.com/office/drawing/2014/main" id="{06A7E096-EB76-41F1-821B-748E010BB60D}"/>
               </a:ext>
             </a:extLst>
           </p:cNvPr>
@@ -2284,7 +2284,7 @@
           <p:cNvPr id="10" name="">
             <a:extLst xmlns:a="http://schemas.openxmlformats.org/drawingml/2006/main">
               <a:ext uri="{FF2B5EF4-FFF2-40B4-BE49-F238E27FC236}">
-                <a16:creationId xmlns:a16="http://schemas.microsoft.com/office/drawing/2014/main" id="{3A414201-8B5E-4014-93B1-1DDB14985B7D}"/>
+                <a16:creationId xmlns:a16="http://schemas.microsoft.com/office/drawing/2014/main" id="{5FF92AC2-C08F-4154-99C2-A2C8113BD346}"/>
               </a:ext>
             </a:extLst>
           </p:cNvPr>
@@ -2341,7 +2341,7 @@
           <p:cNvPr id="11" name="">
             <a:extLst xmlns:a="http://schemas.openxmlformats.org/drawingml/2006/main">
               <a:ext uri="{FF2B5EF4-FFF2-40B4-BE49-F238E27FC236}">
-                <a16:creationId xmlns:a16="http://schemas.microsoft.com/office/drawing/2014/main" id="{D506460A-2033-4E55-B360-EF0843DDB6EB}"/>
+                <a16:creationId xmlns:a16="http://schemas.microsoft.com/office/drawing/2014/main" id="{E21DA5E7-68B8-4954-80E9-BA5E79D146D0}"/>
               </a:ext>
             </a:extLst>
           </p:cNvPr>
@@ -2396,7 +2396,7 @@
     </p:spTree>
     <p:extLst>
       <p:ext uri="{BB962C8B-B14F-4D97-AF65-F5344CB8AC3E}">
-        <p14:creationId xmlns:p14="http://schemas.microsoft.com/office/powerpoint/2010/main" val="1949859414"/>
+        <p14:creationId xmlns:p14="http://schemas.microsoft.com/office/powerpoint/2010/main" val="94798687"/>
       </p:ext>
     </p:extLst>
   </p:cSld>
@@ -2427,7 +2427,7 @@
           <p:cNvPr id="14" name="">
             <a:extLst xmlns:a="http://schemas.openxmlformats.org/drawingml/2006/main">
               <a:ext uri="{FF2B5EF4-FFF2-40B4-BE49-F238E27FC236}">
-                <a16:creationId xmlns:a16="http://schemas.microsoft.com/office/drawing/2014/main" id="{65AC3B15-52AD-416E-B498-7C20FA39E4B8}"/>
+                <a16:creationId xmlns:a16="http://schemas.microsoft.com/office/drawing/2014/main" id="{89A9123C-2126-4AEA-B1C2-56AE4D4607C9}"/>
               </a:ext>
             </a:extLst>
           </p:cNvPr>
@@ -2459,7 +2459,7 @@
           <p:cNvPr id="2" name="">
             <a:extLst xmlns:a="http://schemas.openxmlformats.org/drawingml/2006/main">
               <a:ext uri="{FF2B5EF4-FFF2-40B4-BE49-F238E27FC236}">
-                <a16:creationId xmlns:a16="http://schemas.microsoft.com/office/drawing/2014/main" id="{AB844BDC-7639-4E55-8D85-4880BC99E504}"/>
+                <a16:creationId xmlns:a16="http://schemas.microsoft.com/office/drawing/2014/main" id="{DDAE8ABB-2F00-4438-86A3-7041C6C9F5F6}"/>
               </a:ext>
             </a:extLst>
           </p:cNvPr>
@@ -2516,7 +2516,7 @@
           <p:cNvPr id="3" name="">
             <a:extLst xmlns:a="http://schemas.openxmlformats.org/drawingml/2006/main">
               <a:ext uri="{FF2B5EF4-FFF2-40B4-BE49-F238E27FC236}">
-                <a16:creationId xmlns:a16="http://schemas.microsoft.com/office/drawing/2014/main" id="{7A33A479-6FBA-4137-BF3E-CEFD91AC261F}"/>
+                <a16:creationId xmlns:a16="http://schemas.microsoft.com/office/drawing/2014/main" id="{619ACB76-5076-4CDB-BBC5-5579509A89E4}"/>
               </a:ext>
             </a:extLst>
           </p:cNvPr>
@@ -2548,7 +2548,7 @@
           <p:cNvPr id="4" name="">
             <a:extLst xmlns:a="http://schemas.openxmlformats.org/drawingml/2006/main">
               <a:ext uri="{FF2B5EF4-FFF2-40B4-BE49-F238E27FC236}">
-                <a16:creationId xmlns:a16="http://schemas.microsoft.com/office/drawing/2014/main" id="{1752E26F-EDFF-498F-BB23-E7FD169265DF}"/>
+                <a16:creationId xmlns:a16="http://schemas.microsoft.com/office/drawing/2014/main" id="{B70485A4-FD11-45EB-BC27-E166A88044DD}"/>
               </a:ext>
             </a:extLst>
           </p:cNvPr>
@@ -2605,7 +2605,7 @@
           <p:cNvPr id="5" name="">
             <a:extLst xmlns:a="http://schemas.openxmlformats.org/drawingml/2006/main">
               <a:ext uri="{FF2B5EF4-FFF2-40B4-BE49-F238E27FC236}">
-                <a16:creationId xmlns:a16="http://schemas.microsoft.com/office/drawing/2014/main" id="{A76F3F21-AB5F-414E-BBB7-56F95256FBE1}"/>
+                <a16:creationId xmlns:a16="http://schemas.microsoft.com/office/drawing/2014/main" id="{00E0C4F6-31A4-4DFA-8112-2F6C7D79900F}"/>
               </a:ext>
             </a:extLst>
           </p:cNvPr>
@@ -2662,7 +2662,7 @@
           <p:cNvPr id="6" name="">
             <a:extLst xmlns:a="http://schemas.openxmlformats.org/drawingml/2006/main">
               <a:ext uri="{FF2B5EF4-FFF2-40B4-BE49-F238E27FC236}">
-                <a16:creationId xmlns:a16="http://schemas.microsoft.com/office/drawing/2014/main" id="{B7072FFE-70A4-4ADF-856C-1490DA772A24}"/>
+                <a16:creationId xmlns:a16="http://schemas.microsoft.com/office/drawing/2014/main" id="{2DEEB1D3-19FF-483D-A9D7-7C439EC04386}"/>
               </a:ext>
             </a:extLst>
           </p:cNvPr>
@@ -2719,7 +2719,7 @@
           <p:cNvPr id="7" name="">
             <a:extLst xmlns:a="http://schemas.openxmlformats.org/drawingml/2006/main">
               <a:ext uri="{FF2B5EF4-FFF2-40B4-BE49-F238E27FC236}">
-                <a16:creationId xmlns:a16="http://schemas.microsoft.com/office/drawing/2014/main" id="{BB827760-1600-4F0E-8A20-D7247258CDAA}"/>
+                <a16:creationId xmlns:a16="http://schemas.microsoft.com/office/drawing/2014/main" id="{7C266584-E426-4CC8-98BA-FEC30FF929B6}"/>
               </a:ext>
             </a:extLst>
           </p:cNvPr>
@@ -2751,7 +2751,7 @@
           <p:cNvPr id="8" name="">
             <a:extLst xmlns:a="http://schemas.openxmlformats.org/drawingml/2006/main">
               <a:ext uri="{FF2B5EF4-FFF2-40B4-BE49-F238E27FC236}">
-                <a16:creationId xmlns:a16="http://schemas.microsoft.com/office/drawing/2014/main" id="{D8F59470-5017-4716-8C74-DC149D6AC5CA}"/>
+                <a16:creationId xmlns:a16="http://schemas.microsoft.com/office/drawing/2014/main" id="{6DCAA9DD-B0FA-408E-9DCA-C467A1CA78AC}"/>
               </a:ext>
             </a:extLst>
           </p:cNvPr>
@@ -2808,7 +2808,7 @@
           <p:cNvPr id="9" name="">
             <a:extLst xmlns:a="http://schemas.openxmlformats.org/drawingml/2006/main">
               <a:ext uri="{FF2B5EF4-FFF2-40B4-BE49-F238E27FC236}">
-                <a16:creationId xmlns:a16="http://schemas.microsoft.com/office/drawing/2014/main" id="{8D5A5486-34A7-4BFA-BBA6-AEFE6CADB6B5}"/>
+                <a16:creationId xmlns:a16="http://schemas.microsoft.com/office/drawing/2014/main" id="{A55CC4C6-D660-48EC-9D70-77F209E8A6D4}"/>
               </a:ext>
             </a:extLst>
           </p:cNvPr>
@@ -2865,7 +2865,7 @@
           <p:cNvPr id="10" name="">
             <a:extLst xmlns:a="http://schemas.openxmlformats.org/drawingml/2006/main">
               <a:ext uri="{FF2B5EF4-FFF2-40B4-BE49-F238E27FC236}">
-                <a16:creationId xmlns:a16="http://schemas.microsoft.com/office/drawing/2014/main" id="{1BAE9331-0C1A-4B42-A300-F9AA15D1AE63}"/>
+                <a16:creationId xmlns:a16="http://schemas.microsoft.com/office/drawing/2014/main" id="{5445807B-2F5B-492F-BE41-464D8CE2D1A1}"/>
               </a:ext>
             </a:extLst>
           </p:cNvPr>
@@ -2922,7 +2922,7 @@
           <p:cNvPr id="11" name="">
             <a:extLst xmlns:a="http://schemas.openxmlformats.org/drawingml/2006/main">
               <a:ext uri="{FF2B5EF4-FFF2-40B4-BE49-F238E27FC236}">
-                <a16:creationId xmlns:a16="http://schemas.microsoft.com/office/drawing/2014/main" id="{B68849D6-7B94-4FCF-822E-BE37C9F4B9B8}"/>
+                <a16:creationId xmlns:a16="http://schemas.microsoft.com/office/drawing/2014/main" id="{3F9D85E5-DE0C-4DEC-A6F5-F99A424CDA62}"/>
               </a:ext>
             </a:extLst>
           </p:cNvPr>
@@ -2979,7 +2979,7 @@
           <p:cNvPr id="12" name="">
             <a:extLst xmlns:a="http://schemas.openxmlformats.org/drawingml/2006/main">
               <a:ext uri="{FF2B5EF4-FFF2-40B4-BE49-F238E27FC236}">
-                <a16:creationId xmlns:a16="http://schemas.microsoft.com/office/drawing/2014/main" id="{D1F9A0A6-E851-4D2E-BE1B-B2FCF277F8A5}"/>
+                <a16:creationId xmlns:a16="http://schemas.microsoft.com/office/drawing/2014/main" id="{C7E680AE-C647-47E3-A315-AD72294741CD}"/>
               </a:ext>
             </a:extLst>
           </p:cNvPr>
@@ -3036,7 +3036,7 @@
           <p:cNvPr id="13" name="">
             <a:extLst xmlns:a="http://schemas.openxmlformats.org/drawingml/2006/main">
               <a:ext uri="{FF2B5EF4-FFF2-40B4-BE49-F238E27FC236}">
-                <a16:creationId xmlns:a16="http://schemas.microsoft.com/office/drawing/2014/main" id="{3A3C01C8-16A6-41EF-82CB-5E190B076149}"/>
+                <a16:creationId xmlns:a16="http://schemas.microsoft.com/office/drawing/2014/main" id="{FA91A6EA-E7AB-410C-B2EA-F9D44D884A28}"/>
               </a:ext>
             </a:extLst>
           </p:cNvPr>
@@ -3091,7 +3091,7 @@
     </p:spTree>
     <p:extLst>
       <p:ext uri="{BB962C8B-B14F-4D97-AF65-F5344CB8AC3E}">
-        <p14:creationId xmlns:p14="http://schemas.microsoft.com/office/powerpoint/2010/main" val="1153685661"/>
+        <p14:creationId xmlns:p14="http://schemas.microsoft.com/office/powerpoint/2010/main" val="151433017"/>
       </p:ext>
     </p:extLst>
   </p:cSld>
@@ -3292,7 +3292,7 @@
           <p:cNvPr id="19" name="">
             <a:extLst xmlns:a="http://schemas.openxmlformats.org/drawingml/2006/main">
               <a:ext uri="{FF2B5EF4-FFF2-40B4-BE49-F238E27FC236}">
-                <a16:creationId xmlns:a16="http://schemas.microsoft.com/office/drawing/2014/main" id="{A69092E0-3E1F-4CC6-ACC4-845FD9BD4717}"/>
+                <a16:creationId xmlns:a16="http://schemas.microsoft.com/office/drawing/2014/main" id="{9E9E72E8-0819-4897-AF33-3B46250F54F8}"/>
               </a:ext>
             </a:extLst>
           </p:cNvPr>
@@ -3324,7 +3324,7 @@
           <p:cNvPr id="2" name="">
             <a:extLst xmlns:a="http://schemas.openxmlformats.org/drawingml/2006/main">
               <a:ext uri="{FF2B5EF4-FFF2-40B4-BE49-F238E27FC236}">
-                <a16:creationId xmlns:a16="http://schemas.microsoft.com/office/drawing/2014/main" id="{B74770C0-74BE-4048-B56F-D6CA2EB8DEE8}"/>
+                <a16:creationId xmlns:a16="http://schemas.microsoft.com/office/drawing/2014/main" id="{6B29032C-46C4-4B28-A688-DE761B832547}"/>
               </a:ext>
             </a:extLst>
           </p:cNvPr>
@@ -3381,7 +3381,7 @@
           <p:cNvPr id="3" name="">
             <a:extLst xmlns:a="http://schemas.openxmlformats.org/drawingml/2006/main">
               <a:ext uri="{FF2B5EF4-FFF2-40B4-BE49-F238E27FC236}">
-                <a16:creationId xmlns:a16="http://schemas.microsoft.com/office/drawing/2014/main" id="{074F4C6D-659F-4901-931C-768A1B789862}"/>
+                <a16:creationId xmlns:a16="http://schemas.microsoft.com/office/drawing/2014/main" id="{CFF6448E-4D2B-4187-B8BF-5429F2CAD4A0}"/>
               </a:ext>
             </a:extLst>
           </p:cNvPr>
@@ -3413,7 +3413,7 @@
           <p:cNvPr id="4" name="">
             <a:extLst xmlns:a="http://schemas.openxmlformats.org/drawingml/2006/main">
               <a:ext uri="{FF2B5EF4-FFF2-40B4-BE49-F238E27FC236}">
-                <a16:creationId xmlns:a16="http://schemas.microsoft.com/office/drawing/2014/main" id="{C69BD28C-D9EE-4302-8D8D-3B61DCCBB01A}"/>
+                <a16:creationId xmlns:a16="http://schemas.microsoft.com/office/drawing/2014/main" id="{B2B0A78C-CCF5-4465-90D6-23D9B70927FF}"/>
               </a:ext>
             </a:extLst>
           </p:cNvPr>
@@ -3470,7 +3470,7 @@
           <p:cNvPr id="5" name="">
             <a:extLst xmlns:a="http://schemas.openxmlformats.org/drawingml/2006/main">
               <a:ext uri="{FF2B5EF4-FFF2-40B4-BE49-F238E27FC236}">
-                <a16:creationId xmlns:a16="http://schemas.microsoft.com/office/drawing/2014/main" id="{60E174D5-BF5E-4B65-A1D2-263673EF3C74}"/>
+                <a16:creationId xmlns:a16="http://schemas.microsoft.com/office/drawing/2014/main" id="{376FA56E-F232-422A-A275-934C81011458}"/>
               </a:ext>
             </a:extLst>
           </p:cNvPr>
@@ -3527,7 +3527,7 @@
           <p:cNvPr id="6" name="">
             <a:extLst xmlns:a="http://schemas.openxmlformats.org/drawingml/2006/main">
               <a:ext uri="{FF2B5EF4-FFF2-40B4-BE49-F238E27FC236}">
-                <a16:creationId xmlns:a16="http://schemas.microsoft.com/office/drawing/2014/main" id="{D74E2DB7-978A-418F-A61F-E63C3FC9DDF8}"/>
+                <a16:creationId xmlns:a16="http://schemas.microsoft.com/office/drawing/2014/main" id="{4DA005CF-6C52-46FD-8F7A-0F5A84AAC65D}"/>
               </a:ext>
             </a:extLst>
           </p:cNvPr>
@@ -3584,7 +3584,7 @@
           <p:cNvPr id="7" name="">
             <a:extLst xmlns:a="http://schemas.openxmlformats.org/drawingml/2006/main">
               <a:ext uri="{FF2B5EF4-FFF2-40B4-BE49-F238E27FC236}">
-                <a16:creationId xmlns:a16="http://schemas.microsoft.com/office/drawing/2014/main" id="{30CFA3ED-64D7-4C91-9D2C-60643B99C162}"/>
+                <a16:creationId xmlns:a16="http://schemas.microsoft.com/office/drawing/2014/main" id="{D6D8C23D-39D5-465F-A294-6D4E498E4753}"/>
               </a:ext>
             </a:extLst>
           </p:cNvPr>
@@ -3616,7 +3616,7 @@
           <p:cNvPr id="8" name="">
             <a:extLst xmlns:a="http://schemas.openxmlformats.org/drawingml/2006/main">
               <a:ext uri="{FF2B5EF4-FFF2-40B4-BE49-F238E27FC236}">
-                <a16:creationId xmlns:a16="http://schemas.microsoft.com/office/drawing/2014/main" id="{48C666C3-6220-4420-8892-522CDA655301}"/>
+                <a16:creationId xmlns:a16="http://schemas.microsoft.com/office/drawing/2014/main" id="{917A3A90-A05A-46B5-8885-65AED511C2BC}"/>
               </a:ext>
             </a:extLst>
           </p:cNvPr>
@@ -3673,7 +3673,7 @@
           <p:cNvPr id="9" name="">
             <a:extLst xmlns:a="http://schemas.openxmlformats.org/drawingml/2006/main">
               <a:ext uri="{FF2B5EF4-FFF2-40B4-BE49-F238E27FC236}">
-                <a16:creationId xmlns:a16="http://schemas.microsoft.com/office/drawing/2014/main" id="{DB58C13A-1972-4FF5-87DB-853D2F76BC0E}"/>
+                <a16:creationId xmlns:a16="http://schemas.microsoft.com/office/drawing/2014/main" id="{3633B29E-7290-482A-A0E7-0C5C304E652F}"/>
               </a:ext>
             </a:extLst>
           </p:cNvPr>
@@ -3730,7 +3730,7 @@
           <p:cNvPr id="10" name="">
             <a:extLst xmlns:a="http://schemas.openxmlformats.org/drawingml/2006/main">
               <a:ext uri="{FF2B5EF4-FFF2-40B4-BE49-F238E27FC236}">
-                <a16:creationId xmlns:a16="http://schemas.microsoft.com/office/drawing/2014/main" id="{C580526B-B640-4A71-A5B0-94B73E711643}"/>
+                <a16:creationId xmlns:a16="http://schemas.microsoft.com/office/drawing/2014/main" id="{CB663AE6-2BEF-4849-8B21-166939B2F10E}"/>
               </a:ext>
             </a:extLst>
           </p:cNvPr>
@@ -3787,7 +3787,7 @@
           <p:cNvPr id="11" name="">
             <a:extLst xmlns:a="http://schemas.openxmlformats.org/drawingml/2006/main">
               <a:ext uri="{FF2B5EF4-FFF2-40B4-BE49-F238E27FC236}">
-                <a16:creationId xmlns:a16="http://schemas.microsoft.com/office/drawing/2014/main" id="{134D9B6A-5C06-471F-AC0C-282B930D9BF7}"/>
+                <a16:creationId xmlns:a16="http://schemas.microsoft.com/office/drawing/2014/main" id="{11A76C2D-707E-4FAE-B27F-8E7073ED4D2F}"/>
               </a:ext>
             </a:extLst>
           </p:cNvPr>
@@ -3821,7 +3821,7 @@
           <p:cNvPr id="12" name="">
             <a:extLst xmlns:a="http://schemas.openxmlformats.org/drawingml/2006/main">
               <a:ext uri="{FF2B5EF4-FFF2-40B4-BE49-F238E27FC236}">
-                <a16:creationId xmlns:a16="http://schemas.microsoft.com/office/drawing/2014/main" id="{64B969B6-4D38-4B3C-B0AA-656F74C7EBF5}"/>
+                <a16:creationId xmlns:a16="http://schemas.microsoft.com/office/drawing/2014/main" id="{BE42C0BD-B456-406D-A843-D4B70B691B67}"/>
               </a:ext>
             </a:extLst>
           </p:cNvPr>
@@ -3878,7 +3878,7 @@
           <p:cNvPr id="13" name="">
             <a:extLst xmlns:a="http://schemas.openxmlformats.org/drawingml/2006/main">
               <a:ext uri="{FF2B5EF4-FFF2-40B4-BE49-F238E27FC236}">
-                <a16:creationId xmlns:a16="http://schemas.microsoft.com/office/drawing/2014/main" id="{D0556C3A-31AA-458E-B704-5AC32CDC643C}"/>
+                <a16:creationId xmlns:a16="http://schemas.microsoft.com/office/drawing/2014/main" id="{38B72E6B-1FDC-4135-8A23-5DF698118D88}"/>
               </a:ext>
             </a:extLst>
           </p:cNvPr>
@@ -3935,7 +3935,7 @@
           <p:cNvPr id="14" name="">
             <a:extLst xmlns:a="http://schemas.openxmlformats.org/drawingml/2006/main">
               <a:ext uri="{FF2B5EF4-FFF2-40B4-BE49-F238E27FC236}">
-                <a16:creationId xmlns:a16="http://schemas.microsoft.com/office/drawing/2014/main" id="{2C49784D-7642-4870-B78D-A1D263A94500}"/>
+                <a16:creationId xmlns:a16="http://schemas.microsoft.com/office/drawing/2014/main" id="{D59E8B8E-1CB1-4604-A8BE-2FFB2E74EF78}"/>
               </a:ext>
             </a:extLst>
           </p:cNvPr>
@@ -3992,7 +3992,7 @@
           <p:cNvPr id="15" name="">
             <a:extLst xmlns:a="http://schemas.openxmlformats.org/drawingml/2006/main">
               <a:ext uri="{FF2B5EF4-FFF2-40B4-BE49-F238E27FC236}">
-                <a16:creationId xmlns:a16="http://schemas.microsoft.com/office/drawing/2014/main" id="{309BD9A4-9A69-4CF7-90E0-D26566B0E1C4}"/>
+                <a16:creationId xmlns:a16="http://schemas.microsoft.com/office/drawing/2014/main" id="{FEE2B2BC-0726-45C7-9FF2-5DB08853FCDC}"/>
               </a:ext>
             </a:extLst>
           </p:cNvPr>
@@ -4026,7 +4026,7 @@
           <p:cNvPr id="16" name="">
             <a:extLst xmlns:a="http://schemas.openxmlformats.org/drawingml/2006/main">
               <a:ext uri="{FF2B5EF4-FFF2-40B4-BE49-F238E27FC236}">
-                <a16:creationId xmlns:a16="http://schemas.microsoft.com/office/drawing/2014/main" id="{4AD41D0E-767E-4465-97B3-5C0DCFA713C2}"/>
+                <a16:creationId xmlns:a16="http://schemas.microsoft.com/office/drawing/2014/main" id="{79F9D4D9-B091-4E48-B279-B4286CF85789}"/>
               </a:ext>
             </a:extLst>
           </p:cNvPr>
@@ -4083,7 +4083,7 @@
           <p:cNvPr id="17" name="">
             <a:extLst xmlns:a="http://schemas.openxmlformats.org/drawingml/2006/main">
               <a:ext uri="{FF2B5EF4-FFF2-40B4-BE49-F238E27FC236}">
-                <a16:creationId xmlns:a16="http://schemas.microsoft.com/office/drawing/2014/main" id="{5F2EF1CC-E765-4C23-9D70-8314A8ADA48C}"/>
+                <a16:creationId xmlns:a16="http://schemas.microsoft.com/office/drawing/2014/main" id="{2914354B-E7B0-4C6D-A7B8-85BF7B17FD93}"/>
               </a:ext>
             </a:extLst>
           </p:cNvPr>
@@ -4140,7 +4140,7 @@
           <p:cNvPr id="18" name="">
             <a:extLst xmlns:a="http://schemas.openxmlformats.org/drawingml/2006/main">
               <a:ext uri="{FF2B5EF4-FFF2-40B4-BE49-F238E27FC236}">
-                <a16:creationId xmlns:a16="http://schemas.microsoft.com/office/drawing/2014/main" id="{A61D7449-DFD2-4344-8A0F-633286885F3F}"/>
+                <a16:creationId xmlns:a16="http://schemas.microsoft.com/office/drawing/2014/main" id="{2BB589CC-530D-426A-BCA6-0E54F10E8622}"/>
               </a:ext>
             </a:extLst>
           </p:cNvPr>
@@ -4195,7 +4195,7 @@
     </p:spTree>
     <p:extLst>
       <p:ext uri="{BB962C8B-B14F-4D97-AF65-F5344CB8AC3E}">
-        <p14:creationId xmlns:p14="http://schemas.microsoft.com/office/powerpoint/2010/main" val="898490791"/>
+        <p14:creationId xmlns:p14="http://schemas.microsoft.com/office/powerpoint/2010/main" val="1911123008"/>
       </p:ext>
     </p:extLst>
   </p:cSld>
@@ -4350,7 +4350,7 @@
           <p:cNvPr id="23" name="">
             <a:extLst xmlns:a="http://schemas.openxmlformats.org/drawingml/2006/main">
               <a:ext uri="{FF2B5EF4-FFF2-40B4-BE49-F238E27FC236}">
-                <a16:creationId xmlns:a16="http://schemas.microsoft.com/office/drawing/2014/main" id="{503D7B6D-C10C-4969-BDF4-9B19E32E5BE4}"/>
+                <a16:creationId xmlns:a16="http://schemas.microsoft.com/office/drawing/2014/main" id="{4B541B6B-ECBC-4D5D-92B6-3A08BDC4851B}"/>
               </a:ext>
             </a:extLst>
           </p:cNvPr>
@@ -4382,7 +4382,7 @@
           <p:cNvPr id="2" name="">
             <a:extLst xmlns:a="http://schemas.openxmlformats.org/drawingml/2006/main">
               <a:ext uri="{FF2B5EF4-FFF2-40B4-BE49-F238E27FC236}">
-                <a16:creationId xmlns:a16="http://schemas.microsoft.com/office/drawing/2014/main" id="{5610AAFA-7448-4539-9655-02962D591505}"/>
+                <a16:creationId xmlns:a16="http://schemas.microsoft.com/office/drawing/2014/main" id="{3C6F1BD4-10CD-4128-9876-B512C336E93F}"/>
               </a:ext>
             </a:extLst>
           </p:cNvPr>
@@ -4439,7 +4439,7 @@
           <p:cNvPr id="3" name="">
             <a:extLst xmlns:a="http://schemas.openxmlformats.org/drawingml/2006/main">
               <a:ext uri="{FF2B5EF4-FFF2-40B4-BE49-F238E27FC236}">
-                <a16:creationId xmlns:a16="http://schemas.microsoft.com/office/drawing/2014/main" id="{47E8171D-6E49-42CC-B94E-6A693C0F391F}"/>
+                <a16:creationId xmlns:a16="http://schemas.microsoft.com/office/drawing/2014/main" id="{B7A65AC6-DE6A-4233-B8AA-A5CB50F2DA7F}"/>
               </a:ext>
             </a:extLst>
           </p:cNvPr>
@@ -4471,7 +4471,7 @@
           <p:cNvPr id="4" name="">
             <a:extLst xmlns:a="http://schemas.openxmlformats.org/drawingml/2006/main">
               <a:ext uri="{FF2B5EF4-FFF2-40B4-BE49-F238E27FC236}">
-                <a16:creationId xmlns:a16="http://schemas.microsoft.com/office/drawing/2014/main" id="{668576AA-E0DD-4933-BD58-8B048C42EE33}"/>
+                <a16:creationId xmlns:a16="http://schemas.microsoft.com/office/drawing/2014/main" id="{7E434E6C-D7E1-433C-BE72-A9C2674D36B0}"/>
               </a:ext>
             </a:extLst>
           </p:cNvPr>
@@ -4528,7 +4528,7 @@
           <p:cNvPr id="5" name="">
             <a:extLst xmlns:a="http://schemas.openxmlformats.org/drawingml/2006/main">
               <a:ext uri="{FF2B5EF4-FFF2-40B4-BE49-F238E27FC236}">
-                <a16:creationId xmlns:a16="http://schemas.microsoft.com/office/drawing/2014/main" id="{ABC9C27A-92F9-42A0-A28F-0EC2C46B1927}"/>
+                <a16:creationId xmlns:a16="http://schemas.microsoft.com/office/drawing/2014/main" id="{58E8D7F9-0B37-4B81-986D-FCA8707956F8}"/>
               </a:ext>
             </a:extLst>
           </p:cNvPr>
@@ -4585,7 +4585,7 @@
           <p:cNvPr id="6" name="">
             <a:extLst xmlns:a="http://schemas.openxmlformats.org/drawingml/2006/main">
               <a:ext uri="{FF2B5EF4-FFF2-40B4-BE49-F238E27FC236}">
-                <a16:creationId xmlns:a16="http://schemas.microsoft.com/office/drawing/2014/main" id="{789CD7C5-E0FB-4D2C-9D42-482F1EBFD02E}"/>
+                <a16:creationId xmlns:a16="http://schemas.microsoft.com/office/drawing/2014/main" id="{F529ABF7-2E8B-4356-AA0A-5438B68D3E62}"/>
               </a:ext>
             </a:extLst>
           </p:cNvPr>
@@ -4642,7 +4642,7 @@
           <p:cNvPr id="7" name="">
             <a:extLst xmlns:a="http://schemas.openxmlformats.org/drawingml/2006/main">
               <a:ext uri="{FF2B5EF4-FFF2-40B4-BE49-F238E27FC236}">
-                <a16:creationId xmlns:a16="http://schemas.microsoft.com/office/drawing/2014/main" id="{994D5708-D831-4A32-B0F0-EB6C759AF5CD}"/>
+                <a16:creationId xmlns:a16="http://schemas.microsoft.com/office/drawing/2014/main" id="{A5F95E4C-0B84-4402-AEEA-A2D693FAAA47}"/>
               </a:ext>
             </a:extLst>
           </p:cNvPr>
@@ -4674,7 +4674,7 @@
           <p:cNvPr id="8" name="">
             <a:extLst xmlns:a="http://schemas.openxmlformats.org/drawingml/2006/main">
               <a:ext uri="{FF2B5EF4-FFF2-40B4-BE49-F238E27FC236}">
-                <a16:creationId xmlns:a16="http://schemas.microsoft.com/office/drawing/2014/main" id="{C8E40645-FB15-4A34-976E-2B952BE7EA85}"/>
+                <a16:creationId xmlns:a16="http://schemas.microsoft.com/office/drawing/2014/main" id="{1F92CB18-8728-4B19-8199-5DF82E93A466}"/>
               </a:ext>
             </a:extLst>
           </p:cNvPr>
@@ -4731,7 +4731,7 @@
           <p:cNvPr id="9" name="">
             <a:extLst xmlns:a="http://schemas.openxmlformats.org/drawingml/2006/main">
               <a:ext uri="{FF2B5EF4-FFF2-40B4-BE49-F238E27FC236}">
-                <a16:creationId xmlns:a16="http://schemas.microsoft.com/office/drawing/2014/main" id="{9E0ADC94-3268-430E-A258-9C42269AC69C}"/>
+                <a16:creationId xmlns:a16="http://schemas.microsoft.com/office/drawing/2014/main" id="{7F4DC255-DED7-496B-9259-51493A597E67}"/>
               </a:ext>
             </a:extLst>
           </p:cNvPr>
@@ -4788,7 +4788,7 @@
           <p:cNvPr id="10" name="">
             <a:extLst xmlns:a="http://schemas.openxmlformats.org/drawingml/2006/main">
               <a:ext uri="{FF2B5EF4-FFF2-40B4-BE49-F238E27FC236}">
-                <a16:creationId xmlns:a16="http://schemas.microsoft.com/office/drawing/2014/main" id="{9C30E3BF-601C-4729-AD4E-8435BAD206D2}"/>
+                <a16:creationId xmlns:a16="http://schemas.microsoft.com/office/drawing/2014/main" id="{0B8F8D70-3575-43A1-B9A4-E1CFF13EA0C5}"/>
               </a:ext>
             </a:extLst>
           </p:cNvPr>
@@ -4822,7 +4822,7 @@
           <p:cNvPr id="11" name="">
             <a:extLst xmlns:a="http://schemas.openxmlformats.org/drawingml/2006/main">
               <a:ext uri="{FF2B5EF4-FFF2-40B4-BE49-F238E27FC236}">
-                <a16:creationId xmlns:a16="http://schemas.microsoft.com/office/drawing/2014/main" id="{45E8AA73-273B-4839-86BB-6969785FB715}"/>
+                <a16:creationId xmlns:a16="http://schemas.microsoft.com/office/drawing/2014/main" id="{B934422E-0C98-483C-904F-3269B5242EE2}"/>
               </a:ext>
             </a:extLst>
           </p:cNvPr>
@@ -4854,7 +4854,7 @@
           <p:cNvPr id="12" name="">
             <a:extLst xmlns:a="http://schemas.openxmlformats.org/drawingml/2006/main">
               <a:ext uri="{FF2B5EF4-FFF2-40B4-BE49-F238E27FC236}">
-                <a16:creationId xmlns:a16="http://schemas.microsoft.com/office/drawing/2014/main" id="{B4E8050E-3395-4B73-B99B-25AFE2E06224}"/>
+                <a16:creationId xmlns:a16="http://schemas.microsoft.com/office/drawing/2014/main" id="{6EA7507A-86E6-42B9-8631-A9D5C7D20BBE}"/>
               </a:ext>
             </a:extLst>
           </p:cNvPr>
@@ -4911,7 +4911,7 @@
           <p:cNvPr id="13" name="">
             <a:extLst xmlns:a="http://schemas.openxmlformats.org/drawingml/2006/main">
               <a:ext uri="{FF2B5EF4-FFF2-40B4-BE49-F238E27FC236}">
-                <a16:creationId xmlns:a16="http://schemas.microsoft.com/office/drawing/2014/main" id="{B66B1D01-BBEC-4151-8CB0-B1C58B6D995D}"/>
+                <a16:creationId xmlns:a16="http://schemas.microsoft.com/office/drawing/2014/main" id="{B04E3936-4C25-4FB5-A77A-CCA17298998A}"/>
               </a:ext>
             </a:extLst>
           </p:cNvPr>
@@ -4968,7 +4968,7 @@
           <p:cNvPr id="14" name="">
             <a:extLst xmlns:a="http://schemas.openxmlformats.org/drawingml/2006/main">
               <a:ext uri="{FF2B5EF4-FFF2-40B4-BE49-F238E27FC236}">
-                <a16:creationId xmlns:a16="http://schemas.microsoft.com/office/drawing/2014/main" id="{CC1A9AAF-1AC4-4537-A6C3-225811264E3B}"/>
+                <a16:creationId xmlns:a16="http://schemas.microsoft.com/office/drawing/2014/main" id="{F1F66972-91B0-49C2-82CA-F44BAD88A87D}"/>
               </a:ext>
             </a:extLst>
           </p:cNvPr>
@@ -5002,7 +5002,7 @@
           <p:cNvPr id="15" name="">
             <a:extLst xmlns:a="http://schemas.openxmlformats.org/drawingml/2006/main">
               <a:ext uri="{FF2B5EF4-FFF2-40B4-BE49-F238E27FC236}">
-                <a16:creationId xmlns:a16="http://schemas.microsoft.com/office/drawing/2014/main" id="{8ED76A58-C713-4E6C-BED2-65056FB553F8}"/>
+                <a16:creationId xmlns:a16="http://schemas.microsoft.com/office/drawing/2014/main" id="{F64F1A69-4B84-4446-B56D-1B69EF42F026}"/>
               </a:ext>
             </a:extLst>
           </p:cNvPr>
@@ -5034,7 +5034,7 @@
           <p:cNvPr id="16" name="">
             <a:extLst xmlns:a="http://schemas.openxmlformats.org/drawingml/2006/main">
               <a:ext uri="{FF2B5EF4-FFF2-40B4-BE49-F238E27FC236}">
-                <a16:creationId xmlns:a16="http://schemas.microsoft.com/office/drawing/2014/main" id="{FB4B090C-AC5D-4DE9-99C1-917FC67A3931}"/>
+                <a16:creationId xmlns:a16="http://schemas.microsoft.com/office/drawing/2014/main" id="{61E4C2DA-014A-43D0-BCAF-4FACCE2FC03C}"/>
               </a:ext>
             </a:extLst>
           </p:cNvPr>
@@ -5091,7 +5091,7 @@
           <p:cNvPr id="17" name="">
             <a:extLst xmlns:a="http://schemas.openxmlformats.org/drawingml/2006/main">
               <a:ext uri="{FF2B5EF4-FFF2-40B4-BE49-F238E27FC236}">
-                <a16:creationId xmlns:a16="http://schemas.microsoft.com/office/drawing/2014/main" id="{D04961D8-C8D5-4ECD-ABC1-9B70833826E7}"/>
+                <a16:creationId xmlns:a16="http://schemas.microsoft.com/office/drawing/2014/main" id="{8953F80D-7A19-42E3-B8F6-5F6F76297EA7}"/>
               </a:ext>
             </a:extLst>
           </p:cNvPr>
@@ -5148,7 +5148,7 @@
           <p:cNvPr id="18" name="">
             <a:extLst xmlns:a="http://schemas.openxmlformats.org/drawingml/2006/main">
               <a:ext uri="{FF2B5EF4-FFF2-40B4-BE49-F238E27FC236}">
-                <a16:creationId xmlns:a16="http://schemas.microsoft.com/office/drawing/2014/main" id="{DC3A56B5-5660-4A9D-ADE5-D8AB070E69F2}"/>
+                <a16:creationId xmlns:a16="http://schemas.microsoft.com/office/drawing/2014/main" id="{B62B461F-AADC-4D7A-8F8D-8A8F618AF609}"/>
               </a:ext>
             </a:extLst>
           </p:cNvPr>
@@ -5182,7 +5182,7 @@
           <p:cNvPr id="19" name="">
             <a:extLst xmlns:a="http://schemas.openxmlformats.org/drawingml/2006/main">
               <a:ext uri="{FF2B5EF4-FFF2-40B4-BE49-F238E27FC236}">
-                <a16:creationId xmlns:a16="http://schemas.microsoft.com/office/drawing/2014/main" id="{36D9722F-0A3F-429A-B1DE-EAF69482EA3E}"/>
+                <a16:creationId xmlns:a16="http://schemas.microsoft.com/office/drawing/2014/main" id="{02EEE242-A7F2-4DCB-BB1B-AAC3E7E66EC7}"/>
               </a:ext>
             </a:extLst>
           </p:cNvPr>
@@ -5214,7 +5214,7 @@
           <p:cNvPr id="20" name="">
             <a:extLst xmlns:a="http://schemas.openxmlformats.org/drawingml/2006/main">
               <a:ext uri="{FF2B5EF4-FFF2-40B4-BE49-F238E27FC236}">
-                <a16:creationId xmlns:a16="http://schemas.microsoft.com/office/drawing/2014/main" id="{F6168ED8-5A1F-42BB-9B84-76C43462DD1F}"/>
+                <a16:creationId xmlns:a16="http://schemas.microsoft.com/office/drawing/2014/main" id="{B4CD7DEC-D7A6-42B7-9404-C3E3AEA0DE52}"/>
               </a:ext>
             </a:extLst>
           </p:cNvPr>
@@ -5271,7 +5271,7 @@
           <p:cNvPr id="21" name="">
             <a:extLst xmlns:a="http://schemas.openxmlformats.org/drawingml/2006/main">
               <a:ext uri="{FF2B5EF4-FFF2-40B4-BE49-F238E27FC236}">
-                <a16:creationId xmlns:a16="http://schemas.microsoft.com/office/drawing/2014/main" id="{55E56088-E405-47EF-B4EF-F895809F851A}"/>
+                <a16:creationId xmlns:a16="http://schemas.microsoft.com/office/drawing/2014/main" id="{DEB7EBEC-7E44-4E6C-8039-7E4E14BE40E6}"/>
               </a:ext>
             </a:extLst>
           </p:cNvPr>
@@ -5328,7 +5328,7 @@
           <p:cNvPr id="22" name="">
             <a:extLst xmlns:a="http://schemas.openxmlformats.org/drawingml/2006/main">
               <a:ext uri="{FF2B5EF4-FFF2-40B4-BE49-F238E27FC236}">
-                <a16:creationId xmlns:a16="http://schemas.microsoft.com/office/drawing/2014/main" id="{2E9FFE5A-14AD-43C5-9C15-C0E2A9F0E738}"/>
+                <a16:creationId xmlns:a16="http://schemas.microsoft.com/office/drawing/2014/main" id="{EF2B9BA5-6710-461A-9A42-A4A91EC5621C}"/>
               </a:ext>
             </a:extLst>
           </p:cNvPr>
@@ -5383,7 +5383,7 @@
     </p:spTree>
     <p:extLst>
       <p:ext uri="{BB962C8B-B14F-4D97-AF65-F5344CB8AC3E}">
-        <p14:creationId xmlns:p14="http://schemas.microsoft.com/office/powerpoint/2010/main" val="1405034821"/>
+        <p14:creationId xmlns:p14="http://schemas.microsoft.com/office/powerpoint/2010/main" val="92563962"/>
       </p:ext>
     </p:extLst>
   </p:cSld>
@@ -5584,7 +5584,7 @@
           <p:cNvPr id="23" name="">
             <a:extLst xmlns:a="http://schemas.openxmlformats.org/drawingml/2006/main">
               <a:ext uri="{FF2B5EF4-FFF2-40B4-BE49-F238E27FC236}">
-                <a16:creationId xmlns:a16="http://schemas.microsoft.com/office/drawing/2014/main" id="{2CF8AA63-9A31-4112-85AF-DE956531D56C}"/>
+                <a16:creationId xmlns:a16="http://schemas.microsoft.com/office/drawing/2014/main" id="{0B2EDC21-5172-45EB-A194-B6F630981299}"/>
               </a:ext>
             </a:extLst>
           </p:cNvPr>
@@ -5616,7 +5616,7 @@
           <p:cNvPr id="2" name="">
             <a:extLst xmlns:a="http://schemas.openxmlformats.org/drawingml/2006/main">
               <a:ext uri="{FF2B5EF4-FFF2-40B4-BE49-F238E27FC236}">
-                <a16:creationId xmlns:a16="http://schemas.microsoft.com/office/drawing/2014/main" id="{6800FF89-D546-46EA-9FAB-B71BE4A0216F}"/>
+                <a16:creationId xmlns:a16="http://schemas.microsoft.com/office/drawing/2014/main" id="{FB7AA0F2-4BD9-4CE5-82CF-EC4718EA0ADB}"/>
               </a:ext>
             </a:extLst>
           </p:cNvPr>
@@ -5673,7 +5673,7 @@
           <p:cNvPr id="3" name="">
             <a:extLst xmlns:a="http://schemas.openxmlformats.org/drawingml/2006/main">
               <a:ext uri="{FF2B5EF4-FFF2-40B4-BE49-F238E27FC236}">
-                <a16:creationId xmlns:a16="http://schemas.microsoft.com/office/drawing/2014/main" id="{C5D8D31E-85DC-4C03-B7D2-19E82D3D833B}"/>
+                <a16:creationId xmlns:a16="http://schemas.microsoft.com/office/drawing/2014/main" id="{2D9298D3-9920-47BD-AD89-5A061D605C1D}"/>
               </a:ext>
             </a:extLst>
           </p:cNvPr>
@@ -5705,7 +5705,7 @@
           <p:cNvPr id="4" name="">
             <a:extLst xmlns:a="http://schemas.openxmlformats.org/drawingml/2006/main">
               <a:ext uri="{FF2B5EF4-FFF2-40B4-BE49-F238E27FC236}">
-                <a16:creationId xmlns:a16="http://schemas.microsoft.com/office/drawing/2014/main" id="{B1E6665C-7AD9-449E-B9A5-4BEC2EA289A3}"/>
+                <a16:creationId xmlns:a16="http://schemas.microsoft.com/office/drawing/2014/main" id="{488DACB1-4ACD-4D1B-8463-2421C6FF8827}"/>
               </a:ext>
             </a:extLst>
           </p:cNvPr>
@@ -5762,7 +5762,7 @@
           <p:cNvPr id="5" name="">
             <a:extLst xmlns:a="http://schemas.openxmlformats.org/drawingml/2006/main">
               <a:ext uri="{FF2B5EF4-FFF2-40B4-BE49-F238E27FC236}">
-                <a16:creationId xmlns:a16="http://schemas.microsoft.com/office/drawing/2014/main" id="{44C07933-D901-4874-9865-EC97A2A173FC}"/>
+                <a16:creationId xmlns:a16="http://schemas.microsoft.com/office/drawing/2014/main" id="{B290D273-0A49-4B49-BCC8-8108EA57CBED}"/>
               </a:ext>
             </a:extLst>
           </p:cNvPr>
@@ -5819,7 +5819,7 @@
           <p:cNvPr id="6" name="">
             <a:extLst xmlns:a="http://schemas.openxmlformats.org/drawingml/2006/main">
               <a:ext uri="{FF2B5EF4-FFF2-40B4-BE49-F238E27FC236}">
-                <a16:creationId xmlns:a16="http://schemas.microsoft.com/office/drawing/2014/main" id="{B7E3ADD1-A17C-4346-B9D7-35E94952D4C8}"/>
+                <a16:creationId xmlns:a16="http://schemas.microsoft.com/office/drawing/2014/main" id="{BBB32288-EEB9-4AAD-8F1F-F9B48FC22E24}"/>
               </a:ext>
             </a:extLst>
           </p:cNvPr>
@@ -5876,7 +5876,7 @@
           <p:cNvPr id="7" name="">
             <a:extLst xmlns:a="http://schemas.openxmlformats.org/drawingml/2006/main">
               <a:ext uri="{FF2B5EF4-FFF2-40B4-BE49-F238E27FC236}">
-                <a16:creationId xmlns:a16="http://schemas.microsoft.com/office/drawing/2014/main" id="{9E9C7633-6E84-4910-AF17-328EA123246D}"/>
+                <a16:creationId xmlns:a16="http://schemas.microsoft.com/office/drawing/2014/main" id="{DD664DE4-FD15-47BC-83A0-65DDBED6272A}"/>
               </a:ext>
             </a:extLst>
           </p:cNvPr>
@@ -5908,7 +5908,7 @@
           <p:cNvPr id="8" name="">
             <a:extLst xmlns:a="http://schemas.openxmlformats.org/drawingml/2006/main">
               <a:ext uri="{FF2B5EF4-FFF2-40B4-BE49-F238E27FC236}">
-                <a16:creationId xmlns:a16="http://schemas.microsoft.com/office/drawing/2014/main" id="{414B29C7-935A-4843-AC0F-3D2A0A59C3C2}"/>
+                <a16:creationId xmlns:a16="http://schemas.microsoft.com/office/drawing/2014/main" id="{4471E282-0B46-4F69-A1FF-1435B1B776A3}"/>
               </a:ext>
             </a:extLst>
           </p:cNvPr>
@@ -5965,7 +5965,7 @@
           <p:cNvPr id="9" name="">
             <a:extLst xmlns:a="http://schemas.openxmlformats.org/drawingml/2006/main">
               <a:ext uri="{FF2B5EF4-FFF2-40B4-BE49-F238E27FC236}">
-                <a16:creationId xmlns:a16="http://schemas.microsoft.com/office/drawing/2014/main" id="{5AD8CD56-4D85-46EE-95F9-E56AE09B668C}"/>
+                <a16:creationId xmlns:a16="http://schemas.microsoft.com/office/drawing/2014/main" id="{2A787873-FFAD-473E-8AC9-9F40A4E064E5}"/>
               </a:ext>
             </a:extLst>
           </p:cNvPr>
@@ -6022,7 +6022,7 @@
           <p:cNvPr id="10" name="">
             <a:extLst xmlns:a="http://schemas.openxmlformats.org/drawingml/2006/main">
               <a:ext uri="{FF2B5EF4-FFF2-40B4-BE49-F238E27FC236}">
-                <a16:creationId xmlns:a16="http://schemas.microsoft.com/office/drawing/2014/main" id="{B52E3C32-9A41-4326-80B3-6AD1A7CD8277}"/>
+                <a16:creationId xmlns:a16="http://schemas.microsoft.com/office/drawing/2014/main" id="{4470EB81-CEF8-48A0-BFC5-905CCD6929F7}"/>
               </a:ext>
             </a:extLst>
           </p:cNvPr>
@@ -6056,7 +6056,7 @@
           <p:cNvPr id="11" name="">
             <a:extLst xmlns:a="http://schemas.openxmlformats.org/drawingml/2006/main">
               <a:ext uri="{FF2B5EF4-FFF2-40B4-BE49-F238E27FC236}">
-                <a16:creationId xmlns:a16="http://schemas.microsoft.com/office/drawing/2014/main" id="{D9B2D2D2-7C02-4E0E-ADE1-B8065729AECA}"/>
+                <a16:creationId xmlns:a16="http://schemas.microsoft.com/office/drawing/2014/main" id="{AC801BE9-989C-4805-A67A-AC40CCD024EE}"/>
               </a:ext>
             </a:extLst>
           </p:cNvPr>
@@ -6088,7 +6088,7 @@
           <p:cNvPr id="12" name="">
             <a:extLst xmlns:a="http://schemas.openxmlformats.org/drawingml/2006/main">
               <a:ext uri="{FF2B5EF4-FFF2-40B4-BE49-F238E27FC236}">
-                <a16:creationId xmlns:a16="http://schemas.microsoft.com/office/drawing/2014/main" id="{581776B7-5BBD-4DC0-A582-F5ED3AA13519}"/>
+                <a16:creationId xmlns:a16="http://schemas.microsoft.com/office/drawing/2014/main" id="{C1438117-4FB3-48AF-9221-8D87394EEE47}"/>
               </a:ext>
             </a:extLst>
           </p:cNvPr>
@@ -6145,7 +6145,7 @@
           <p:cNvPr id="13" name="">
             <a:extLst xmlns:a="http://schemas.openxmlformats.org/drawingml/2006/main">
               <a:ext uri="{FF2B5EF4-FFF2-40B4-BE49-F238E27FC236}">
-                <a16:creationId xmlns:a16="http://schemas.microsoft.com/office/drawing/2014/main" id="{00F5E79C-C081-4318-9A3D-5C64A83C90C2}"/>
+                <a16:creationId xmlns:a16="http://schemas.microsoft.com/office/drawing/2014/main" id="{04ACE223-23E4-4F6B-A549-7A0CF64875AE}"/>
               </a:ext>
             </a:extLst>
           </p:cNvPr>
@@ -6202,7 +6202,7 @@
           <p:cNvPr id="14" name="">
             <a:extLst xmlns:a="http://schemas.openxmlformats.org/drawingml/2006/main">
               <a:ext uri="{FF2B5EF4-FFF2-40B4-BE49-F238E27FC236}">
-                <a16:creationId xmlns:a16="http://schemas.microsoft.com/office/drawing/2014/main" id="{D3F5F3D5-DC99-495C-BD4E-5756B350688B}"/>
+                <a16:creationId xmlns:a16="http://schemas.microsoft.com/office/drawing/2014/main" id="{0A979171-F18B-4F17-A3C0-0F99CEC6A0A6}"/>
               </a:ext>
             </a:extLst>
           </p:cNvPr>
@@ -6236,7 +6236,7 @@
           <p:cNvPr id="15" name="">
             <a:extLst xmlns:a="http://schemas.openxmlformats.org/drawingml/2006/main">
               <a:ext uri="{FF2B5EF4-FFF2-40B4-BE49-F238E27FC236}">
-                <a16:creationId xmlns:a16="http://schemas.microsoft.com/office/drawing/2014/main" id="{99722BD9-CCC4-44F8-999C-5137E6EC09F5}"/>
+                <a16:creationId xmlns:a16="http://schemas.microsoft.com/office/drawing/2014/main" id="{521A9CBF-C5AE-4B48-994A-EB20E136B376}"/>
               </a:ext>
             </a:extLst>
           </p:cNvPr>
@@ -6268,7 +6268,7 @@
           <p:cNvPr id="16" name="">
             <a:extLst xmlns:a="http://schemas.openxmlformats.org/drawingml/2006/main">
               <a:ext uri="{FF2B5EF4-FFF2-40B4-BE49-F238E27FC236}">
-                <a16:creationId xmlns:a16="http://schemas.microsoft.com/office/drawing/2014/main" id="{27D6B4B5-C0A0-4257-AFC5-70C5E2116051}"/>
+                <a16:creationId xmlns:a16="http://schemas.microsoft.com/office/drawing/2014/main" id="{ECCBE286-543F-456B-B3CB-49FF4F2889FF}"/>
               </a:ext>
             </a:extLst>
           </p:cNvPr>
@@ -6325,7 +6325,7 @@
           <p:cNvPr id="17" name="">
             <a:extLst xmlns:a="http://schemas.openxmlformats.org/drawingml/2006/main">
               <a:ext uri="{FF2B5EF4-FFF2-40B4-BE49-F238E27FC236}">
-                <a16:creationId xmlns:a16="http://schemas.microsoft.com/office/drawing/2014/main" id="{E3D83E61-7527-42DF-AAF6-B3B498AF8858}"/>
+                <a16:creationId xmlns:a16="http://schemas.microsoft.com/office/drawing/2014/main" id="{1D54D1E4-48F2-4C6D-8B4F-EF50EA8B7C04}"/>
               </a:ext>
             </a:extLst>
           </p:cNvPr>
@@ -6382,7 +6382,7 @@
           <p:cNvPr id="18" name="">
             <a:extLst xmlns:a="http://schemas.openxmlformats.org/drawingml/2006/main">
               <a:ext uri="{FF2B5EF4-FFF2-40B4-BE49-F238E27FC236}">
-                <a16:creationId xmlns:a16="http://schemas.microsoft.com/office/drawing/2014/main" id="{4C960748-908B-434F-90FE-6180C4597D23}"/>
+                <a16:creationId xmlns:a16="http://schemas.microsoft.com/office/drawing/2014/main" id="{F2B28DAA-5C0C-4E22-99D8-B53548536482}"/>
               </a:ext>
             </a:extLst>
           </p:cNvPr>
@@ -6416,7 +6416,7 @@
           <p:cNvPr id="19" name="">
             <a:extLst xmlns:a="http://schemas.openxmlformats.org/drawingml/2006/main">
               <a:ext uri="{FF2B5EF4-FFF2-40B4-BE49-F238E27FC236}">
-                <a16:creationId xmlns:a16="http://schemas.microsoft.com/office/drawing/2014/main" id="{C68C833C-6171-4B71-A12C-F71A01DB1A7E}"/>
+                <a16:creationId xmlns:a16="http://schemas.microsoft.com/office/drawing/2014/main" id="{CC261A89-961D-4609-B950-E2C5C0652803}"/>
               </a:ext>
             </a:extLst>
           </p:cNvPr>
@@ -6448,7 +6448,7 @@
           <p:cNvPr id="20" name="">
             <a:extLst xmlns:a="http://schemas.openxmlformats.org/drawingml/2006/main">
               <a:ext uri="{FF2B5EF4-FFF2-40B4-BE49-F238E27FC236}">
-                <a16:creationId xmlns:a16="http://schemas.microsoft.com/office/drawing/2014/main" id="{BB9E23C4-9A70-48C2-8245-704FB855DBFE}"/>
+                <a16:creationId xmlns:a16="http://schemas.microsoft.com/office/drawing/2014/main" id="{133C7418-3A19-481D-8AFA-3AE1E7171C50}"/>
               </a:ext>
             </a:extLst>
           </p:cNvPr>
@@ -6505,7 +6505,7 @@
           <p:cNvPr id="21" name="">
             <a:extLst xmlns:a="http://schemas.openxmlformats.org/drawingml/2006/main">
               <a:ext uri="{FF2B5EF4-FFF2-40B4-BE49-F238E27FC236}">
-                <a16:creationId xmlns:a16="http://schemas.microsoft.com/office/drawing/2014/main" id="{45984C23-54EA-4570-AB27-2ABE18B21540}"/>
+                <a16:creationId xmlns:a16="http://schemas.microsoft.com/office/drawing/2014/main" id="{6F758EF8-6BB9-42A3-9813-FC55A95F5E8D}"/>
               </a:ext>
             </a:extLst>
           </p:cNvPr>
@@ -6562,7 +6562,7 @@
           <p:cNvPr id="22" name="">
             <a:extLst xmlns:a="http://schemas.openxmlformats.org/drawingml/2006/main">
               <a:ext uri="{FF2B5EF4-FFF2-40B4-BE49-F238E27FC236}">
-                <a16:creationId xmlns:a16="http://schemas.microsoft.com/office/drawing/2014/main" id="{F206E133-4B3F-407F-8AEB-9ABF674E63C5}"/>
+                <a16:creationId xmlns:a16="http://schemas.microsoft.com/office/drawing/2014/main" id="{7CCE110B-2B6F-4A6D-A7F3-FE8C672410E8}"/>
               </a:ext>
             </a:extLst>
           </p:cNvPr>
@@ -6617,7 +6617,7 @@
     </p:spTree>
     <p:extLst>
       <p:ext uri="{BB962C8B-B14F-4D97-AF65-F5344CB8AC3E}">
-        <p14:creationId xmlns:p14="http://schemas.microsoft.com/office/powerpoint/2010/main" val="1067795986"/>
+        <p14:creationId xmlns:p14="http://schemas.microsoft.com/office/powerpoint/2010/main" val="1315278915"/>
       </p:ext>
     </p:extLst>
   </p:cSld>
@@ -6818,7 +6818,7 @@
           <p:cNvPr id="16" name="">
             <a:extLst xmlns:a="http://schemas.openxmlformats.org/drawingml/2006/main">
               <a:ext uri="{FF2B5EF4-FFF2-40B4-BE49-F238E27FC236}">
-                <a16:creationId xmlns:a16="http://schemas.microsoft.com/office/drawing/2014/main" id="{0CA7415B-F500-44DC-AA4E-B680971F8062}"/>
+                <a16:creationId xmlns:a16="http://schemas.microsoft.com/office/drawing/2014/main" id="{CD6CAD7A-65CF-4EF5-B181-887B8698DCA0}"/>
               </a:ext>
             </a:extLst>
           </p:cNvPr>
@@ -6850,7 +6850,7 @@
           <p:cNvPr id="2" name="">
             <a:extLst xmlns:a="http://schemas.openxmlformats.org/drawingml/2006/main">
               <a:ext uri="{FF2B5EF4-FFF2-40B4-BE49-F238E27FC236}">
-                <a16:creationId xmlns:a16="http://schemas.microsoft.com/office/drawing/2014/main" id="{4A46317F-F6C9-4043-BD65-7EF3CB51BED4}"/>
+                <a16:creationId xmlns:a16="http://schemas.microsoft.com/office/drawing/2014/main" id="{6D532353-6D3D-4563-BAE1-3C3C2C2ECEF7}"/>
               </a:ext>
             </a:extLst>
           </p:cNvPr>
@@ -6907,7 +6907,7 @@
           <p:cNvPr id="3" name="">
             <a:extLst xmlns:a="http://schemas.openxmlformats.org/drawingml/2006/main">
               <a:ext uri="{FF2B5EF4-FFF2-40B4-BE49-F238E27FC236}">
-                <a16:creationId xmlns:a16="http://schemas.microsoft.com/office/drawing/2014/main" id="{C669159E-6E98-44E7-B580-D4809B087EFF}"/>
+                <a16:creationId xmlns:a16="http://schemas.microsoft.com/office/drawing/2014/main" id="{040FB0E8-82D7-4992-9BDC-2253729ACDC5}"/>
               </a:ext>
             </a:extLst>
           </p:cNvPr>
@@ -6939,7 +6939,7 @@
           <p:cNvPr id="4" name="">
             <a:extLst xmlns:a="http://schemas.openxmlformats.org/drawingml/2006/main">
               <a:ext uri="{FF2B5EF4-FFF2-40B4-BE49-F238E27FC236}">
-                <a16:creationId xmlns:a16="http://schemas.microsoft.com/office/drawing/2014/main" id="{0F1787E6-E575-41D7-B3DB-04596FAE7961}"/>
+                <a16:creationId xmlns:a16="http://schemas.microsoft.com/office/drawing/2014/main" id="{E5F91CBF-8C63-4E2D-9EEE-BFB3B558D67C}"/>
               </a:ext>
             </a:extLst>
           </p:cNvPr>
@@ -6996,7 +6996,7 @@
           <p:cNvPr id="5" name="">
             <a:extLst xmlns:a="http://schemas.openxmlformats.org/drawingml/2006/main">
               <a:ext uri="{FF2B5EF4-FFF2-40B4-BE49-F238E27FC236}">
-                <a16:creationId xmlns:a16="http://schemas.microsoft.com/office/drawing/2014/main" id="{5212A872-36C5-403D-84BB-470E5BAE438D}"/>
+                <a16:creationId xmlns:a16="http://schemas.microsoft.com/office/drawing/2014/main" id="{482B754C-FDAD-4AAF-9A2A-451B532C0709}"/>
               </a:ext>
             </a:extLst>
           </p:cNvPr>
@@ -7053,7 +7053,7 @@
           <p:cNvPr id="6" name="">
             <a:extLst xmlns:a="http://schemas.openxmlformats.org/drawingml/2006/main">
               <a:ext uri="{FF2B5EF4-FFF2-40B4-BE49-F238E27FC236}">
-                <a16:creationId xmlns:a16="http://schemas.microsoft.com/office/drawing/2014/main" id="{2B4BAC06-ABFA-402D-81BB-E0EF67B48F48}"/>
+                <a16:creationId xmlns:a16="http://schemas.microsoft.com/office/drawing/2014/main" id="{E25CF520-1943-4A7E-A38D-6C43C92FA846}"/>
               </a:ext>
             </a:extLst>
           </p:cNvPr>
@@ -7110,7 +7110,7 @@
           <p:cNvPr id="7" name="">
             <a:extLst xmlns:a="http://schemas.openxmlformats.org/drawingml/2006/main">
               <a:ext uri="{FF2B5EF4-FFF2-40B4-BE49-F238E27FC236}">
-                <a16:creationId xmlns:a16="http://schemas.microsoft.com/office/drawing/2014/main" id="{6E6B71D5-618E-44DB-9E1A-FDE655FE7A42}"/>
+                <a16:creationId xmlns:a16="http://schemas.microsoft.com/office/drawing/2014/main" id="{C20ED996-8F54-4528-A414-B5608C3B185C}"/>
               </a:ext>
             </a:extLst>
           </p:cNvPr>
@@ -7142,7 +7142,7 @@
           <p:cNvPr id="8" name="">
             <a:extLst xmlns:a="http://schemas.openxmlformats.org/drawingml/2006/main">
               <a:ext uri="{FF2B5EF4-FFF2-40B4-BE49-F238E27FC236}">
-                <a16:creationId xmlns:a16="http://schemas.microsoft.com/office/drawing/2014/main" id="{32098C86-ECC6-4E59-B2D9-ACD8E06CFE20}"/>
+                <a16:creationId xmlns:a16="http://schemas.microsoft.com/office/drawing/2014/main" id="{74571C06-18F9-47E9-A91A-D65A8B78E057}"/>
               </a:ext>
             </a:extLst>
           </p:cNvPr>
@@ -7199,7 +7199,7 @@
           <p:cNvPr id="9" name="">
             <a:extLst xmlns:a="http://schemas.openxmlformats.org/drawingml/2006/main">
               <a:ext uri="{FF2B5EF4-FFF2-40B4-BE49-F238E27FC236}">
-                <a16:creationId xmlns:a16="http://schemas.microsoft.com/office/drawing/2014/main" id="{D8AFD233-DCEA-46B3-A342-7A21CCA62EA0}"/>
+                <a16:creationId xmlns:a16="http://schemas.microsoft.com/office/drawing/2014/main" id="{2ED656B6-B40D-49D3-807F-5ADEF0BC3332}"/>
               </a:ext>
             </a:extLst>
           </p:cNvPr>
@@ -7256,7 +7256,7 @@
           <p:cNvPr id="10" name="">
             <a:extLst xmlns:a="http://schemas.openxmlformats.org/drawingml/2006/main">
               <a:ext uri="{FF2B5EF4-FFF2-40B4-BE49-F238E27FC236}">
-                <a16:creationId xmlns:a16="http://schemas.microsoft.com/office/drawing/2014/main" id="{EED07852-DE30-4463-966B-FBA63EC867FE}"/>
+                <a16:creationId xmlns:a16="http://schemas.microsoft.com/office/drawing/2014/main" id="{84BC156E-C5E6-4410-B17C-5D23AC8B0810}"/>
               </a:ext>
             </a:extLst>
           </p:cNvPr>
@@ -7313,7 +7313,7 @@
           <p:cNvPr id="11" name="">
             <a:extLst xmlns:a="http://schemas.openxmlformats.org/drawingml/2006/main">
               <a:ext uri="{FF2B5EF4-FFF2-40B4-BE49-F238E27FC236}">
-                <a16:creationId xmlns:a16="http://schemas.microsoft.com/office/drawing/2014/main" id="{5617973C-A42E-4F32-B5BF-474BC61BB6CB}"/>
+                <a16:creationId xmlns:a16="http://schemas.microsoft.com/office/drawing/2014/main" id="{36A818E1-7908-4447-AAD9-A4F6416103CD}"/>
               </a:ext>
             </a:extLst>
           </p:cNvPr>
@@ -7345,7 +7345,7 @@
           <p:cNvPr id="12" name="">
             <a:extLst xmlns:a="http://schemas.openxmlformats.org/drawingml/2006/main">
               <a:ext uri="{FF2B5EF4-FFF2-40B4-BE49-F238E27FC236}">
-                <a16:creationId xmlns:a16="http://schemas.microsoft.com/office/drawing/2014/main" id="{8189AB8E-BFA9-4B7E-A774-B5A5AEA23E59}"/>
+                <a16:creationId xmlns:a16="http://schemas.microsoft.com/office/drawing/2014/main" id="{8A46FCA6-2191-4B9E-A298-B79EF0C865EB}"/>
               </a:ext>
             </a:extLst>
           </p:cNvPr>
@@ -7402,7 +7402,7 @@
           <p:cNvPr id="13" name="">
             <a:extLst xmlns:a="http://schemas.openxmlformats.org/drawingml/2006/main">
               <a:ext uri="{FF2B5EF4-FFF2-40B4-BE49-F238E27FC236}">
-                <a16:creationId xmlns:a16="http://schemas.microsoft.com/office/drawing/2014/main" id="{D857CDC3-FA40-4E56-A577-AA9C5784A4E6}"/>
+                <a16:creationId xmlns:a16="http://schemas.microsoft.com/office/drawing/2014/main" id="{455F3A02-7AE9-4694-8C69-1592F5671B8D}"/>
               </a:ext>
             </a:extLst>
           </p:cNvPr>
@@ -7459,7 +7459,7 @@
           <p:cNvPr id="14" name="">
             <a:extLst xmlns:a="http://schemas.openxmlformats.org/drawingml/2006/main">
               <a:ext uri="{FF2B5EF4-FFF2-40B4-BE49-F238E27FC236}">
-                <a16:creationId xmlns:a16="http://schemas.microsoft.com/office/drawing/2014/main" id="{187ED175-7164-479C-A8D2-0506B89841DC}"/>
+                <a16:creationId xmlns:a16="http://schemas.microsoft.com/office/drawing/2014/main" id="{18C8B579-7F21-4F1F-8727-D725001EFC33}"/>
               </a:ext>
             </a:extLst>
           </p:cNvPr>
@@ -7516,7 +7516,7 @@
           <p:cNvPr id="15" name="">
             <a:extLst xmlns:a="http://schemas.openxmlformats.org/drawingml/2006/main">
               <a:ext uri="{FF2B5EF4-FFF2-40B4-BE49-F238E27FC236}">
-                <a16:creationId xmlns:a16="http://schemas.microsoft.com/office/drawing/2014/main" id="{70C04C94-EC0D-4E7C-845C-8B36461C8870}"/>
+                <a16:creationId xmlns:a16="http://schemas.microsoft.com/office/drawing/2014/main" id="{C4262B36-305A-4A41-B716-3219D9BDDB9E}"/>
               </a:ext>
             </a:extLst>
           </p:cNvPr>
@@ -7571,7 +7571,7 @@
     </p:spTree>
     <p:extLst>
       <p:ext uri="{BB962C8B-B14F-4D97-AF65-F5344CB8AC3E}">
-        <p14:creationId xmlns:p14="http://schemas.microsoft.com/office/powerpoint/2010/main" val="627145437"/>
+        <p14:creationId xmlns:p14="http://schemas.microsoft.com/office/powerpoint/2010/main" val="1979811450"/>
       </p:ext>
     </p:extLst>
   </p:cSld>
@@ -7772,7 +7772,7 @@
           <p:cNvPr id="23" name="">
             <a:extLst xmlns:a="http://schemas.openxmlformats.org/drawingml/2006/main">
               <a:ext uri="{FF2B5EF4-FFF2-40B4-BE49-F238E27FC236}">
-                <a16:creationId xmlns:a16="http://schemas.microsoft.com/office/drawing/2014/main" id="{E72C6136-9999-45BD-9667-A8F4374C8E58}"/>
+                <a16:creationId xmlns:a16="http://schemas.microsoft.com/office/drawing/2014/main" id="{AC0B341D-AE04-4FF2-8AF7-DD772FABAF5A}"/>
               </a:ext>
             </a:extLst>
           </p:cNvPr>
@@ -7804,7 +7804,7 @@
           <p:cNvPr id="2" name="">
             <a:extLst xmlns:a="http://schemas.openxmlformats.org/drawingml/2006/main">
               <a:ext uri="{FF2B5EF4-FFF2-40B4-BE49-F238E27FC236}">
-                <a16:creationId xmlns:a16="http://schemas.microsoft.com/office/drawing/2014/main" id="{72DE4D35-AA05-4E5C-AC4A-C59CE9E65AEE}"/>
+                <a16:creationId xmlns:a16="http://schemas.microsoft.com/office/drawing/2014/main" id="{C66B01E5-E5BF-4F17-8F97-32736C0D4DC6}"/>
               </a:ext>
             </a:extLst>
           </p:cNvPr>
@@ -7861,7 +7861,7 @@
           <p:cNvPr id="3" name="">
             <a:extLst xmlns:a="http://schemas.openxmlformats.org/drawingml/2006/main">
               <a:ext uri="{FF2B5EF4-FFF2-40B4-BE49-F238E27FC236}">
-                <a16:creationId xmlns:a16="http://schemas.microsoft.com/office/drawing/2014/main" id="{755FC424-4830-49D8-BE36-9D433C3EADE5}"/>
+                <a16:creationId xmlns:a16="http://schemas.microsoft.com/office/drawing/2014/main" id="{D5140E42-68FB-47B8-BBFB-9E01623A9B2B}"/>
               </a:ext>
             </a:extLst>
           </p:cNvPr>
@@ -7893,7 +7893,7 @@
           <p:cNvPr id="4" name="">
             <a:extLst xmlns:a="http://schemas.openxmlformats.org/drawingml/2006/main">
               <a:ext uri="{FF2B5EF4-FFF2-40B4-BE49-F238E27FC236}">
-                <a16:creationId xmlns:a16="http://schemas.microsoft.com/office/drawing/2014/main" id="{8DD2E818-E97D-48DF-BA50-66D35D149218}"/>
+                <a16:creationId xmlns:a16="http://schemas.microsoft.com/office/drawing/2014/main" id="{19DDA66E-D934-4C17-83E9-663A17CE0FF1}"/>
               </a:ext>
             </a:extLst>
           </p:cNvPr>
@@ -7950,7 +7950,7 @@
           <p:cNvPr id="5" name="">
             <a:extLst xmlns:a="http://schemas.openxmlformats.org/drawingml/2006/main">
               <a:ext uri="{FF2B5EF4-FFF2-40B4-BE49-F238E27FC236}">
-                <a16:creationId xmlns:a16="http://schemas.microsoft.com/office/drawing/2014/main" id="{F1593283-EBFB-4693-8A32-57F142A9FF2D}"/>
+                <a16:creationId xmlns:a16="http://schemas.microsoft.com/office/drawing/2014/main" id="{C8EA7875-03DF-4086-8E5D-E165A971A5E4}"/>
               </a:ext>
             </a:extLst>
           </p:cNvPr>
@@ -8007,7 +8007,7 @@
           <p:cNvPr id="6" name="">
             <a:extLst xmlns:a="http://schemas.openxmlformats.org/drawingml/2006/main">
               <a:ext uri="{FF2B5EF4-FFF2-40B4-BE49-F238E27FC236}">
-                <a16:creationId xmlns:a16="http://schemas.microsoft.com/office/drawing/2014/main" id="{11603FE3-E82F-4D49-B33B-883F1E824AF4}"/>
+                <a16:creationId xmlns:a16="http://schemas.microsoft.com/office/drawing/2014/main" id="{3BA24011-F9BA-4ACB-9A86-218FFF7EA8BE}"/>
               </a:ext>
             </a:extLst>
           </p:cNvPr>
@@ -8064,7 +8064,7 @@
           <p:cNvPr id="7" name="">
             <a:extLst xmlns:a="http://schemas.openxmlformats.org/drawingml/2006/main">
               <a:ext uri="{FF2B5EF4-FFF2-40B4-BE49-F238E27FC236}">
-                <a16:creationId xmlns:a16="http://schemas.microsoft.com/office/drawing/2014/main" id="{918927A6-3C4E-4BC3-809C-AE3DE792699B}"/>
+                <a16:creationId xmlns:a16="http://schemas.microsoft.com/office/drawing/2014/main" id="{013994B8-FD97-4DD1-A718-24DDCCF471C5}"/>
               </a:ext>
             </a:extLst>
           </p:cNvPr>
@@ -8096,7 +8096,7 @@
           <p:cNvPr id="8" name="">
             <a:extLst xmlns:a="http://schemas.openxmlformats.org/drawingml/2006/main">
               <a:ext uri="{FF2B5EF4-FFF2-40B4-BE49-F238E27FC236}">
-                <a16:creationId xmlns:a16="http://schemas.microsoft.com/office/drawing/2014/main" id="{277A101A-C422-409F-938D-EE52D9D86B50}"/>
+                <a16:creationId xmlns:a16="http://schemas.microsoft.com/office/drawing/2014/main" id="{93ABEFAF-9E06-4629-8840-41BB70131BF9}"/>
               </a:ext>
             </a:extLst>
           </p:cNvPr>
@@ -8153,7 +8153,7 @@
           <p:cNvPr id="9" name="">
             <a:extLst xmlns:a="http://schemas.openxmlformats.org/drawingml/2006/main">
               <a:ext uri="{FF2B5EF4-FFF2-40B4-BE49-F238E27FC236}">
-                <a16:creationId xmlns:a16="http://schemas.microsoft.com/office/drawing/2014/main" id="{691B4D13-85DD-4A2B-89D7-7B14C0332B3C}"/>
+                <a16:creationId xmlns:a16="http://schemas.microsoft.com/office/drawing/2014/main" id="{C9FE48BE-4043-48B0-A7AB-B5E01F08EF28}"/>
               </a:ext>
             </a:extLst>
           </p:cNvPr>
@@ -8210,19 +8210,19 @@
           <p:cNvPr id="10" name="">
             <a:extLst xmlns:a="http://schemas.openxmlformats.org/drawingml/2006/main">
               <a:ext uri="{FF2B5EF4-FFF2-40B4-BE49-F238E27FC236}">
-                <a16:creationId xmlns:a16="http://schemas.microsoft.com/office/drawing/2014/main" id="{D2FE4B73-5726-4DBC-B2C9-254394142681}"/>
-              </a:ext>
-            </a:extLst>
-          </p:cNvPr>
-          <p:cNvSpPr>
-            <a:spLocks xmlns:a="http://schemas.openxmlformats.org/drawingml/2006/main" noGrp="1"/>
-          </p:cNvSpPr>
-          <p:nvPr/>
-        </p:nvSpPr>
-        <p:spPr>
-          <a:xfrm xmlns:a="http://schemas.openxmlformats.org/drawingml/2006/main">
-            <a:off x="914400" y="1257300"/>
-            <a:ext cx="10363200" cy="781050"/>
+                <a16:creationId xmlns:a16="http://schemas.microsoft.com/office/drawing/2014/main" id="{9572218B-CE60-42E5-AD60-DF4BFC97936F}"/>
+              </a:ext>
+            </a:extLst>
+          </p:cNvPr>
+          <p:cNvSpPr>
+            <a:spLocks xmlns:a="http://schemas.openxmlformats.org/drawingml/2006/main" noGrp="1"/>
+          </p:cNvSpPr>
+          <p:nvPr/>
+        </p:nvSpPr>
+        <p:spPr>
+          <a:xfrm xmlns:a="http://schemas.openxmlformats.org/drawingml/2006/main">
+            <a:off x="857250" y="1219200"/>
+            <a:ext cx="10477500" cy="742950"/>
           </a:xfrm>
           <a:prstGeom xmlns:a="http://schemas.openxmlformats.org/drawingml/2006/main" prst="rect">
             <a:avLst/>
@@ -8239,7 +8239,7 @@
           <a:lstStyle xmlns:a="http://schemas.openxmlformats.org/drawingml/2006/main"/>
           <a:p xmlns:a="http://schemas.openxmlformats.org/drawingml/2006/main">
             <a:pPr algn="ctr">
-              <a:defRPr sz="2175" b="1">
+              <a:defRPr sz="2100" b="1">
                 <a:solidFill>
                   <a:srgbClr val="17253A"/>
                 </a:solidFill>
@@ -8249,7 +8249,7 @@
               </a:defRPr>
             </a:pPr>
             <a:r>
-              <a:rPr sz="2175" b="1">
+              <a:rPr sz="2100" b="1">
                 <a:solidFill>
                   <a:srgbClr val="17253A"/>
                 </a:solidFill>
@@ -8267,28 +8267,30 @@
           <p:cNvPr id="11" name="">
             <a:extLst xmlns:a="http://schemas.openxmlformats.org/drawingml/2006/main">
               <a:ext uri="{FF2B5EF4-FFF2-40B4-BE49-F238E27FC236}">
-                <a16:creationId xmlns:a16="http://schemas.microsoft.com/office/drawing/2014/main" id="{1ED9CD72-AF3A-4577-A6EC-062BFB7BDA44}"/>
-              </a:ext>
-            </a:extLst>
-          </p:cNvPr>
-          <p:cNvSpPr>
-            <a:spLocks xmlns:a="http://schemas.openxmlformats.org/drawingml/2006/main" noGrp="1"/>
-          </p:cNvSpPr>
-          <p:nvPr/>
-        </p:nvSpPr>
-        <p:spPr>
-          <a:xfrm xmlns:a="http://schemas.openxmlformats.org/drawingml/2006/main">
-            <a:off x="1000125" y="2247900"/>
-            <a:ext cx="476250" cy="476250"/>
-          </a:xfrm>
-          <a:prstGeom xmlns:a="http://schemas.openxmlformats.org/drawingml/2006/main" prst="ellipse">
+                <a16:creationId xmlns:a16="http://schemas.microsoft.com/office/drawing/2014/main" id="{0EAD3151-32A3-4B7C-860B-AC27EB608244}"/>
+              </a:ext>
+            </a:extLst>
+          </p:cNvPr>
+          <p:cNvSpPr>
+            <a:spLocks xmlns:a="http://schemas.openxmlformats.org/drawingml/2006/main" noGrp="1"/>
+          </p:cNvSpPr>
+          <p:nvPr/>
+        </p:nvSpPr>
+        <p:spPr>
+          <a:xfrm xmlns:a="http://schemas.openxmlformats.org/drawingml/2006/main">
+            <a:off x="971550" y="2124075"/>
+            <a:ext cx="38100" cy="3524250"/>
+          </a:xfrm>
+          <a:prstGeom xmlns:a="http://schemas.openxmlformats.org/drawingml/2006/main" prst="rect">
             <a:avLst/>
           </a:prstGeom>
           <a:solidFill xmlns:a="http://schemas.openxmlformats.org/drawingml/2006/main">
-            <a:srgbClr val="18324A"/>
+            <a:srgbClr val="2C6E73"/>
           </a:solidFill>
           <a:ln xmlns:a="http://schemas.openxmlformats.org/drawingml/2006/main" w="0">
-            <a:noFill/>
+            <a:solidFill>
+              <a:srgbClr val="2C6E73"/>
+            </a:solidFill>
           </a:ln>
         </p:spPr>
       </p:sp>
@@ -8297,19 +8299,19 @@
           <p:cNvPr id="12" name="">
             <a:extLst xmlns:a="http://schemas.openxmlformats.org/drawingml/2006/main">
               <a:ext uri="{FF2B5EF4-FFF2-40B4-BE49-F238E27FC236}">
-                <a16:creationId xmlns:a16="http://schemas.microsoft.com/office/drawing/2014/main" id="{506C0C32-EB53-46FB-9234-B67C7CF61C73}"/>
-              </a:ext>
-            </a:extLst>
-          </p:cNvPr>
-          <p:cNvSpPr>
-            <a:spLocks xmlns:a="http://schemas.openxmlformats.org/drawingml/2006/main" noGrp="1"/>
-          </p:cNvSpPr>
-          <p:nvPr/>
-        </p:nvSpPr>
-        <p:spPr>
-          <a:xfrm xmlns:a="http://schemas.openxmlformats.org/drawingml/2006/main">
-            <a:off x="1000125" y="2276475"/>
-            <a:ext cx="476250" cy="419100"/>
+                <a16:creationId xmlns:a16="http://schemas.microsoft.com/office/drawing/2014/main" id="{6BF4DF06-E8A5-408E-9811-C0EE0EDEB142}"/>
+              </a:ext>
+            </a:extLst>
+          </p:cNvPr>
+          <p:cNvSpPr>
+            <a:spLocks xmlns:a="http://schemas.openxmlformats.org/drawingml/2006/main" noGrp="1"/>
+          </p:cNvSpPr>
+          <p:nvPr/>
+        </p:nvSpPr>
+        <p:spPr>
+          <a:xfrm xmlns:a="http://schemas.openxmlformats.org/drawingml/2006/main">
+            <a:off x="1162050" y="2200275"/>
+            <a:ext cx="400050" cy="400050"/>
           </a:xfrm>
           <a:prstGeom xmlns:a="http://schemas.openxmlformats.org/drawingml/2006/main" prst="rect">
             <a:avLst/>
@@ -8326,9 +8328,9 @@
           <a:lstStyle xmlns:a="http://schemas.openxmlformats.org/drawingml/2006/main"/>
           <a:p xmlns:a="http://schemas.openxmlformats.org/drawingml/2006/main">
             <a:pPr algn="ctr">
-              <a:defRPr sz="1350" b="1">
-                <a:solidFill>
-                  <a:srgbClr val="FFFFFF"/>
+              <a:defRPr sz="1125" b="1">
+                <a:solidFill>
+                  <a:srgbClr val="2C6E73"/>
                 </a:solidFill>
                 <a:latin typeface="Arial"/>
                 <a:ea typeface="Arial"/>
@@ -8336,9 +8338,9 @@
               </a:defRPr>
             </a:pPr>
             <a:r>
-              <a:rPr sz="1350" b="1">
-                <a:solidFill>
-                  <a:srgbClr val="FFFFFF"/>
+              <a:rPr sz="1125" b="1">
+                <a:solidFill>
+                  <a:srgbClr val="2C6E73"/>
                 </a:solidFill>
                 <a:latin typeface="Arial"/>
                 <a:ea typeface="Arial"/>
@@ -8354,19 +8356,19 @@
           <p:cNvPr id="13" name="">
             <a:extLst xmlns:a="http://schemas.openxmlformats.org/drawingml/2006/main">
               <a:ext uri="{FF2B5EF4-FFF2-40B4-BE49-F238E27FC236}">
-                <a16:creationId xmlns:a16="http://schemas.microsoft.com/office/drawing/2014/main" id="{25EE7BE1-B371-4776-AFE5-22723E99F4AA}"/>
-              </a:ext>
-            </a:extLst>
-          </p:cNvPr>
-          <p:cNvSpPr>
-            <a:spLocks xmlns:a="http://schemas.openxmlformats.org/drawingml/2006/main" noGrp="1"/>
-          </p:cNvSpPr>
-          <p:nvPr/>
-        </p:nvSpPr>
-        <p:spPr>
-          <a:xfrm xmlns:a="http://schemas.openxmlformats.org/drawingml/2006/main">
-            <a:off x="1714500" y="2181225"/>
-            <a:ext cx="9429750" cy="609600"/>
+                <a16:creationId xmlns:a16="http://schemas.microsoft.com/office/drawing/2014/main" id="{7ED90031-B38C-426E-9B7B-073BB498738E}"/>
+              </a:ext>
+            </a:extLst>
+          </p:cNvPr>
+          <p:cNvSpPr>
+            <a:spLocks xmlns:a="http://schemas.openxmlformats.org/drawingml/2006/main" noGrp="1"/>
+          </p:cNvSpPr>
+          <p:nvPr/>
+        </p:nvSpPr>
+        <p:spPr>
+          <a:xfrm xmlns:a="http://schemas.openxmlformats.org/drawingml/2006/main">
+            <a:off x="1714500" y="2114550"/>
+            <a:ext cx="9525000" cy="809625"/>
           </a:xfrm>
           <a:prstGeom xmlns:a="http://schemas.openxmlformats.org/drawingml/2006/main" prst="rect">
             <a:avLst/>
@@ -8383,7 +8385,7 @@
           <a:lstStyle xmlns:a="http://schemas.openxmlformats.org/drawingml/2006/main"/>
           <a:p xmlns:a="http://schemas.openxmlformats.org/drawingml/2006/main">
             <a:pPr algn="l">
-              <a:defRPr sz="1500" b="0">
+              <a:defRPr sz="1725" b="0">
                 <a:solidFill>
                   <a:srgbClr val="17253A"/>
                 </a:solidFill>
@@ -8393,7 +8395,7 @@
               </a:defRPr>
             </a:pPr>
             <a:r>
-              <a:rPr sz="1500" b="0">
+              <a:rPr sz="1725" b="0">
                 <a:solidFill>
                   <a:srgbClr val="17253A"/>
                 </a:solidFill>
@@ -8401,7 +8403,7 @@
                 <a:ea typeface="Arial"/>
                 <a:cs typeface="Arial"/>
               </a:rPr>
-              <a:t>Identify the structure: Read or record x before y and note the quadrant.</a:t>
+              <a:t>A = (-4, 3)</a:t>
             </a:r>
           </a:p>
         </p:txBody>
@@ -8411,28 +8413,30 @@
           <p:cNvPr id="14" name="">
             <a:extLst xmlns:a="http://schemas.openxmlformats.org/drawingml/2006/main">
               <a:ext uri="{FF2B5EF4-FFF2-40B4-BE49-F238E27FC236}">
-                <a16:creationId xmlns:a16="http://schemas.microsoft.com/office/drawing/2014/main" id="{0703FB04-B6CC-4138-9709-A7FAACD6133C}"/>
-              </a:ext>
-            </a:extLst>
-          </p:cNvPr>
-          <p:cNvSpPr>
-            <a:spLocks xmlns:a="http://schemas.openxmlformats.org/drawingml/2006/main" noGrp="1"/>
-          </p:cNvSpPr>
-          <p:nvPr/>
-        </p:nvSpPr>
-        <p:spPr>
-          <a:xfrm xmlns:a="http://schemas.openxmlformats.org/drawingml/2006/main">
-            <a:off x="1000125" y="2990850"/>
-            <a:ext cx="476250" cy="476250"/>
-          </a:xfrm>
-          <a:prstGeom xmlns:a="http://schemas.openxmlformats.org/drawingml/2006/main" prst="ellipse">
+                <a16:creationId xmlns:a16="http://schemas.microsoft.com/office/drawing/2014/main" id="{144B55F9-76E7-463C-8164-3EACF7D2A3E7}"/>
+              </a:ext>
+            </a:extLst>
+          </p:cNvPr>
+          <p:cNvSpPr>
+            <a:spLocks xmlns:a="http://schemas.openxmlformats.org/drawingml/2006/main" noGrp="1"/>
+          </p:cNvSpPr>
+          <p:nvPr/>
+        </p:nvSpPr>
+        <p:spPr>
+          <a:xfrm xmlns:a="http://schemas.openxmlformats.org/drawingml/2006/main">
+            <a:off x="1714500" y="2943225"/>
+            <a:ext cx="9334500" cy="9525"/>
+          </a:xfrm>
+          <a:prstGeom xmlns:a="http://schemas.openxmlformats.org/drawingml/2006/main" prst="rect">
             <a:avLst/>
           </a:prstGeom>
           <a:solidFill xmlns:a="http://schemas.openxmlformats.org/drawingml/2006/main">
-            <a:srgbClr val="2C6E73"/>
+            <a:srgbClr val="D9E0E6"/>
           </a:solidFill>
           <a:ln xmlns:a="http://schemas.openxmlformats.org/drawingml/2006/main" w="0">
-            <a:noFill/>
+            <a:solidFill>
+              <a:srgbClr val="D9E0E6"/>
+            </a:solidFill>
           </a:ln>
         </p:spPr>
       </p:sp>
@@ -8441,19 +8445,19 @@
           <p:cNvPr id="15" name="">
             <a:extLst xmlns:a="http://schemas.openxmlformats.org/drawingml/2006/main">
               <a:ext uri="{FF2B5EF4-FFF2-40B4-BE49-F238E27FC236}">
-                <a16:creationId xmlns:a16="http://schemas.microsoft.com/office/drawing/2014/main" id="{8852DAB1-49B1-4E2A-A95E-C52EB9B01D74}"/>
-              </a:ext>
-            </a:extLst>
-          </p:cNvPr>
-          <p:cNvSpPr>
-            <a:spLocks xmlns:a="http://schemas.openxmlformats.org/drawingml/2006/main" noGrp="1"/>
-          </p:cNvSpPr>
-          <p:nvPr/>
-        </p:nvSpPr>
-        <p:spPr>
-          <a:xfrm xmlns:a="http://schemas.openxmlformats.org/drawingml/2006/main">
-            <a:off x="1000125" y="3019425"/>
-            <a:ext cx="476250" cy="419100"/>
+                <a16:creationId xmlns:a16="http://schemas.microsoft.com/office/drawing/2014/main" id="{2F1CF23F-473E-4456-953F-5EB1B0F813A4}"/>
+              </a:ext>
+            </a:extLst>
+          </p:cNvPr>
+          <p:cNvSpPr>
+            <a:spLocks xmlns:a="http://schemas.openxmlformats.org/drawingml/2006/main" noGrp="1"/>
+          </p:cNvSpPr>
+          <p:nvPr/>
+        </p:nvSpPr>
+        <p:spPr>
+          <a:xfrm xmlns:a="http://schemas.openxmlformats.org/drawingml/2006/main">
+            <a:off x="1162050" y="3076575"/>
+            <a:ext cx="400050" cy="400050"/>
           </a:xfrm>
           <a:prstGeom xmlns:a="http://schemas.openxmlformats.org/drawingml/2006/main" prst="rect">
             <a:avLst/>
@@ -8470,9 +8474,9 @@
           <a:lstStyle xmlns:a="http://schemas.openxmlformats.org/drawingml/2006/main"/>
           <a:p xmlns:a="http://schemas.openxmlformats.org/drawingml/2006/main">
             <a:pPr algn="ctr">
-              <a:defRPr sz="1350" b="1">
-                <a:solidFill>
-                  <a:srgbClr val="FFFFFF"/>
+              <a:defRPr sz="1125" b="1">
+                <a:solidFill>
+                  <a:srgbClr val="2C6E73"/>
                 </a:solidFill>
                 <a:latin typeface="Arial"/>
                 <a:ea typeface="Arial"/>
@@ -8480,9 +8484,9 @@
               </a:defRPr>
             </a:pPr>
             <a:r>
-              <a:rPr sz="1350" b="1">
-                <a:solidFill>
-                  <a:srgbClr val="FFFFFF"/>
+              <a:rPr sz="1125" b="1">
+                <a:solidFill>
+                  <a:srgbClr val="2C6E73"/>
                 </a:solidFill>
                 <a:latin typeface="Arial"/>
                 <a:ea typeface="Arial"/>
@@ -8498,19 +8502,19 @@
           <p:cNvPr id="16" name="">
             <a:extLst xmlns:a="http://schemas.openxmlformats.org/drawingml/2006/main">
               <a:ext uri="{FF2B5EF4-FFF2-40B4-BE49-F238E27FC236}">
-                <a16:creationId xmlns:a16="http://schemas.microsoft.com/office/drawing/2014/main" id="{D2CC45BB-DDC3-4571-9D86-7F70DF942DC7}"/>
-              </a:ext>
-            </a:extLst>
-          </p:cNvPr>
-          <p:cNvSpPr>
-            <a:spLocks xmlns:a="http://schemas.openxmlformats.org/drawingml/2006/main" noGrp="1"/>
-          </p:cNvSpPr>
-          <p:nvPr/>
-        </p:nvSpPr>
-        <p:spPr>
-          <a:xfrm xmlns:a="http://schemas.openxmlformats.org/drawingml/2006/main">
-            <a:off x="1714500" y="2924175"/>
-            <a:ext cx="9429750" cy="609600"/>
+                <a16:creationId xmlns:a16="http://schemas.microsoft.com/office/drawing/2014/main" id="{AE2E41BF-55CF-48A3-95F5-D5BFC109F9E4}"/>
+              </a:ext>
+            </a:extLst>
+          </p:cNvPr>
+          <p:cNvSpPr>
+            <a:spLocks xmlns:a="http://schemas.openxmlformats.org/drawingml/2006/main" noGrp="1"/>
+          </p:cNvSpPr>
+          <p:nvPr/>
+        </p:nvSpPr>
+        <p:spPr>
+          <a:xfrm xmlns:a="http://schemas.openxmlformats.org/drawingml/2006/main">
+            <a:off x="1714500" y="2990850"/>
+            <a:ext cx="9525000" cy="809625"/>
           </a:xfrm>
           <a:prstGeom xmlns:a="http://schemas.openxmlformats.org/drawingml/2006/main" prst="rect">
             <a:avLst/>
@@ -8527,7 +8531,7 @@
           <a:lstStyle xmlns:a="http://schemas.openxmlformats.org/drawingml/2006/main"/>
           <a:p xmlns:a="http://schemas.openxmlformats.org/drawingml/2006/main">
             <a:pPr algn="l">
-              <a:defRPr sz="1500" b="0">
+              <a:defRPr sz="1725" b="0">
                 <a:solidFill>
                   <a:srgbClr val="17253A"/>
                 </a:solidFill>
@@ -8537,7 +8541,7 @@
               </a:defRPr>
             </a:pPr>
             <a:r>
-              <a:rPr sz="1500" b="0">
+              <a:rPr sz="1725" b="0">
                 <a:solidFill>
                   <a:srgbClr val="17253A"/>
                 </a:solidFill>
@@ -8545,7 +8549,7 @@
                 <a:ea typeface="Arial"/>
                 <a:cs typeface="Arial"/>
               </a:rPr>
-              <a:t>Set up the method: Apply the same vector or mirror line to every vertex.</a:t>
+              <a:t>x is negative: move 4 left</a:t>
             </a:r>
           </a:p>
         </p:txBody>
@@ -8555,28 +8559,30 @@
           <p:cNvPr id="17" name="">
             <a:extLst xmlns:a="http://schemas.openxmlformats.org/drawingml/2006/main">
               <a:ext uri="{FF2B5EF4-FFF2-40B4-BE49-F238E27FC236}">
-                <a16:creationId xmlns:a16="http://schemas.microsoft.com/office/drawing/2014/main" id="{382A25DA-2287-4E4A-89D1-DAA90C0996B7}"/>
-              </a:ext>
-            </a:extLst>
-          </p:cNvPr>
-          <p:cNvSpPr>
-            <a:spLocks xmlns:a="http://schemas.openxmlformats.org/drawingml/2006/main" noGrp="1"/>
-          </p:cNvSpPr>
-          <p:nvPr/>
-        </p:nvSpPr>
-        <p:spPr>
-          <a:xfrm xmlns:a="http://schemas.openxmlformats.org/drawingml/2006/main">
-            <a:off x="1000125" y="3733800"/>
-            <a:ext cx="476250" cy="476250"/>
-          </a:xfrm>
-          <a:prstGeom xmlns:a="http://schemas.openxmlformats.org/drawingml/2006/main" prst="ellipse">
+                <a16:creationId xmlns:a16="http://schemas.microsoft.com/office/drawing/2014/main" id="{5B7F0CF4-BF58-4AF1-B5A1-C7BE88EABE61}"/>
+              </a:ext>
+            </a:extLst>
+          </p:cNvPr>
+          <p:cNvSpPr>
+            <a:spLocks xmlns:a="http://schemas.openxmlformats.org/drawingml/2006/main" noGrp="1"/>
+          </p:cNvSpPr>
+          <p:nvPr/>
+        </p:nvSpPr>
+        <p:spPr>
+          <a:xfrm xmlns:a="http://schemas.openxmlformats.org/drawingml/2006/main">
+            <a:off x="1714500" y="3819525"/>
+            <a:ext cx="9334500" cy="9525"/>
+          </a:xfrm>
+          <a:prstGeom xmlns:a="http://schemas.openxmlformats.org/drawingml/2006/main" prst="rect">
             <a:avLst/>
           </a:prstGeom>
           <a:solidFill xmlns:a="http://schemas.openxmlformats.org/drawingml/2006/main">
-            <a:srgbClr val="2C6E73"/>
+            <a:srgbClr val="D9E0E6"/>
           </a:solidFill>
           <a:ln xmlns:a="http://schemas.openxmlformats.org/drawingml/2006/main" w="0">
-            <a:noFill/>
+            <a:solidFill>
+              <a:srgbClr val="D9E0E6"/>
+            </a:solidFill>
           </a:ln>
         </p:spPr>
       </p:sp>
@@ -8585,19 +8591,19 @@
           <p:cNvPr id="18" name="">
             <a:extLst xmlns:a="http://schemas.openxmlformats.org/drawingml/2006/main">
               <a:ext uri="{FF2B5EF4-FFF2-40B4-BE49-F238E27FC236}">
-                <a16:creationId xmlns:a16="http://schemas.microsoft.com/office/drawing/2014/main" id="{550D7A86-6E4C-440A-82C3-7DB5E8DC9372}"/>
-              </a:ext>
-            </a:extLst>
-          </p:cNvPr>
-          <p:cNvSpPr>
-            <a:spLocks xmlns:a="http://schemas.openxmlformats.org/drawingml/2006/main" noGrp="1"/>
-          </p:cNvSpPr>
-          <p:nvPr/>
-        </p:nvSpPr>
-        <p:spPr>
-          <a:xfrm xmlns:a="http://schemas.openxmlformats.org/drawingml/2006/main">
-            <a:off x="1000125" y="3762375"/>
-            <a:ext cx="476250" cy="419100"/>
+                <a16:creationId xmlns:a16="http://schemas.microsoft.com/office/drawing/2014/main" id="{84F5E927-6EEE-46A2-9087-91BF260F9C19}"/>
+              </a:ext>
+            </a:extLst>
+          </p:cNvPr>
+          <p:cNvSpPr>
+            <a:spLocks xmlns:a="http://schemas.openxmlformats.org/drawingml/2006/main" noGrp="1"/>
+          </p:cNvSpPr>
+          <p:nvPr/>
+        </p:nvSpPr>
+        <p:spPr>
+          <a:xfrm xmlns:a="http://schemas.openxmlformats.org/drawingml/2006/main">
+            <a:off x="1162050" y="3952875"/>
+            <a:ext cx="400050" cy="400050"/>
           </a:xfrm>
           <a:prstGeom xmlns:a="http://schemas.openxmlformats.org/drawingml/2006/main" prst="rect">
             <a:avLst/>
@@ -8614,9 +8620,9 @@
           <a:lstStyle xmlns:a="http://schemas.openxmlformats.org/drawingml/2006/main"/>
           <a:p xmlns:a="http://schemas.openxmlformats.org/drawingml/2006/main">
             <a:pPr algn="ctr">
-              <a:defRPr sz="1350" b="1">
-                <a:solidFill>
-                  <a:srgbClr val="FFFFFF"/>
+              <a:defRPr sz="1125" b="1">
+                <a:solidFill>
+                  <a:srgbClr val="2C6E73"/>
                 </a:solidFill>
                 <a:latin typeface="Arial"/>
                 <a:ea typeface="Arial"/>
@@ -8624,9 +8630,9 @@
               </a:defRPr>
             </a:pPr>
             <a:r>
-              <a:rPr sz="1350" b="1">
-                <a:solidFill>
-                  <a:srgbClr val="FFFFFF"/>
+              <a:rPr sz="1125" b="1">
+                <a:solidFill>
+                  <a:srgbClr val="2C6E73"/>
                 </a:solidFill>
                 <a:latin typeface="Arial"/>
                 <a:ea typeface="Arial"/>
@@ -8642,19 +8648,19 @@
           <p:cNvPr id="19" name="">
             <a:extLst xmlns:a="http://schemas.openxmlformats.org/drawingml/2006/main">
               <a:ext uri="{FF2B5EF4-FFF2-40B4-BE49-F238E27FC236}">
-                <a16:creationId xmlns:a16="http://schemas.microsoft.com/office/drawing/2014/main" id="{92DEA1CA-B395-4AF8-B624-849EA031ACC3}"/>
-              </a:ext>
-            </a:extLst>
-          </p:cNvPr>
-          <p:cNvSpPr>
-            <a:spLocks xmlns:a="http://schemas.openxmlformats.org/drawingml/2006/main" noGrp="1"/>
-          </p:cNvSpPr>
-          <p:nvPr/>
-        </p:nvSpPr>
-        <p:spPr>
-          <a:xfrm xmlns:a="http://schemas.openxmlformats.org/drawingml/2006/main">
-            <a:off x="1714500" y="3667125"/>
-            <a:ext cx="9429750" cy="609600"/>
+                <a16:creationId xmlns:a16="http://schemas.microsoft.com/office/drawing/2014/main" id="{1FE5E950-8FB7-43BA-939C-F4F3D93B8838}"/>
+              </a:ext>
+            </a:extLst>
+          </p:cNvPr>
+          <p:cNvSpPr>
+            <a:spLocks xmlns:a="http://schemas.openxmlformats.org/drawingml/2006/main" noGrp="1"/>
+          </p:cNvSpPr>
+          <p:nvPr/>
+        </p:nvSpPr>
+        <p:spPr>
+          <a:xfrm xmlns:a="http://schemas.openxmlformats.org/drawingml/2006/main">
+            <a:off x="1714500" y="3867150"/>
+            <a:ext cx="9525000" cy="809625"/>
           </a:xfrm>
           <a:prstGeom xmlns:a="http://schemas.openxmlformats.org/drawingml/2006/main" prst="rect">
             <a:avLst/>
@@ -8671,7 +8677,7 @@
           <a:lstStyle xmlns:a="http://schemas.openxmlformats.org/drawingml/2006/main"/>
           <a:p xmlns:a="http://schemas.openxmlformats.org/drawingml/2006/main">
             <a:pPr algn="l">
-              <a:defRPr sz="1500" b="0">
+              <a:defRPr sz="1725" b="0">
                 <a:solidFill>
                   <a:srgbClr val="17253A"/>
                 </a:solidFill>
@@ -8681,7 +8687,7 @@
               </a:defRPr>
             </a:pPr>
             <a:r>
-              <a:rPr sz="1500" b="0">
+              <a:rPr sz="1725" b="0">
                 <a:solidFill>
                   <a:srgbClr val="17253A"/>
                 </a:solidFill>
@@ -8689,7 +8695,7 @@
                 <a:ea typeface="Arial"/>
                 <a:cs typeface="Arial"/>
               </a:rPr>
-              <a:t>Complete the calculation: Quadrant II.</a:t>
+              <a:t>y is positive: move 3 up</a:t>
             </a:r>
           </a:p>
         </p:txBody>
@@ -8699,28 +8705,30 @@
           <p:cNvPr id="20" name="">
             <a:extLst xmlns:a="http://schemas.openxmlformats.org/drawingml/2006/main">
               <a:ext uri="{FF2B5EF4-FFF2-40B4-BE49-F238E27FC236}">
-                <a16:creationId xmlns:a16="http://schemas.microsoft.com/office/drawing/2014/main" id="{31150DFD-E272-47DE-9ABD-A93DD983F09B}"/>
-              </a:ext>
-            </a:extLst>
-          </p:cNvPr>
-          <p:cNvSpPr>
-            <a:spLocks xmlns:a="http://schemas.openxmlformats.org/drawingml/2006/main" noGrp="1"/>
-          </p:cNvSpPr>
-          <p:nvPr/>
-        </p:nvSpPr>
-        <p:spPr>
-          <a:xfrm xmlns:a="http://schemas.openxmlformats.org/drawingml/2006/main">
-            <a:off x="1000125" y="4476750"/>
-            <a:ext cx="476250" cy="476250"/>
-          </a:xfrm>
-          <a:prstGeom xmlns:a="http://schemas.openxmlformats.org/drawingml/2006/main" prst="ellipse">
+                <a16:creationId xmlns:a16="http://schemas.microsoft.com/office/drawing/2014/main" id="{844E8F0E-3092-456D-A058-BF36492D6D21}"/>
+              </a:ext>
+            </a:extLst>
+          </p:cNvPr>
+          <p:cNvSpPr>
+            <a:spLocks xmlns:a="http://schemas.openxmlformats.org/drawingml/2006/main" noGrp="1"/>
+          </p:cNvSpPr>
+          <p:nvPr/>
+        </p:nvSpPr>
+        <p:spPr>
+          <a:xfrm xmlns:a="http://schemas.openxmlformats.org/drawingml/2006/main">
+            <a:off x="1714500" y="4695825"/>
+            <a:ext cx="9334500" cy="9525"/>
+          </a:xfrm>
+          <a:prstGeom xmlns:a="http://schemas.openxmlformats.org/drawingml/2006/main" prst="rect">
             <a:avLst/>
           </a:prstGeom>
           <a:solidFill xmlns:a="http://schemas.openxmlformats.org/drawingml/2006/main">
-            <a:srgbClr val="2C6E73"/>
+            <a:srgbClr val="D9E0E6"/>
           </a:solidFill>
           <a:ln xmlns:a="http://schemas.openxmlformats.org/drawingml/2006/main" w="0">
-            <a:noFill/>
+            <a:solidFill>
+              <a:srgbClr val="D9E0E6"/>
+            </a:solidFill>
           </a:ln>
         </p:spPr>
       </p:sp>
@@ -8729,19 +8737,19 @@
           <p:cNvPr id="21" name="">
             <a:extLst xmlns:a="http://schemas.openxmlformats.org/drawingml/2006/main">
               <a:ext uri="{FF2B5EF4-FFF2-40B4-BE49-F238E27FC236}">
-                <a16:creationId xmlns:a16="http://schemas.microsoft.com/office/drawing/2014/main" id="{47271554-1D36-4636-921D-196FDE8A84E2}"/>
-              </a:ext>
-            </a:extLst>
-          </p:cNvPr>
-          <p:cNvSpPr>
-            <a:spLocks xmlns:a="http://schemas.openxmlformats.org/drawingml/2006/main" noGrp="1"/>
-          </p:cNvSpPr>
-          <p:nvPr/>
-        </p:nvSpPr>
-        <p:spPr>
-          <a:xfrm xmlns:a="http://schemas.openxmlformats.org/drawingml/2006/main">
-            <a:off x="1000125" y="4505325"/>
-            <a:ext cx="476250" cy="419100"/>
+                <a16:creationId xmlns:a16="http://schemas.microsoft.com/office/drawing/2014/main" id="{D888DEAF-6403-4271-91A8-17E3A3E67907}"/>
+              </a:ext>
+            </a:extLst>
+          </p:cNvPr>
+          <p:cNvSpPr>
+            <a:spLocks xmlns:a="http://schemas.openxmlformats.org/drawingml/2006/main" noGrp="1"/>
+          </p:cNvSpPr>
+          <p:nvPr/>
+        </p:nvSpPr>
+        <p:spPr>
+          <a:xfrm xmlns:a="http://schemas.openxmlformats.org/drawingml/2006/main">
+            <a:off x="1162050" y="4829175"/>
+            <a:ext cx="400050" cy="400050"/>
           </a:xfrm>
           <a:prstGeom xmlns:a="http://schemas.openxmlformats.org/drawingml/2006/main" prst="rect">
             <a:avLst/>
@@ -8758,9 +8766,9 @@
           <a:lstStyle xmlns:a="http://schemas.openxmlformats.org/drawingml/2006/main"/>
           <a:p xmlns:a="http://schemas.openxmlformats.org/drawingml/2006/main">
             <a:pPr algn="ctr">
-              <a:defRPr sz="1350" b="1">
-                <a:solidFill>
-                  <a:srgbClr val="FFFFFF"/>
+              <a:defRPr sz="1125" b="1">
+                <a:solidFill>
+                  <a:srgbClr val="2F785D"/>
                 </a:solidFill>
                 <a:latin typeface="Arial"/>
                 <a:ea typeface="Arial"/>
@@ -8768,9 +8776,9 @@
               </a:defRPr>
             </a:pPr>
             <a:r>
-              <a:rPr sz="1350" b="1">
-                <a:solidFill>
-                  <a:srgbClr val="FFFFFF"/>
+              <a:rPr sz="1125" b="1">
+                <a:solidFill>
+                  <a:srgbClr val="2F785D"/>
                 </a:solidFill>
                 <a:latin typeface="Arial"/>
                 <a:ea typeface="Arial"/>
@@ -8786,19 +8794,19 @@
           <p:cNvPr id="22" name="">
             <a:extLst xmlns:a="http://schemas.openxmlformats.org/drawingml/2006/main">
               <a:ext uri="{FF2B5EF4-FFF2-40B4-BE49-F238E27FC236}">
-                <a16:creationId xmlns:a16="http://schemas.microsoft.com/office/drawing/2014/main" id="{46B0C5F1-10C3-4680-8BA7-1A33AD1A2761}"/>
-              </a:ext>
-            </a:extLst>
-          </p:cNvPr>
-          <p:cNvSpPr>
-            <a:spLocks xmlns:a="http://schemas.openxmlformats.org/drawingml/2006/main" noGrp="1"/>
-          </p:cNvSpPr>
-          <p:nvPr/>
-        </p:nvSpPr>
-        <p:spPr>
-          <a:xfrm xmlns:a="http://schemas.openxmlformats.org/drawingml/2006/main">
-            <a:off x="1714500" y="4410075"/>
-            <a:ext cx="9429750" cy="609600"/>
+                <a16:creationId xmlns:a16="http://schemas.microsoft.com/office/drawing/2014/main" id="{A7264C44-D8A2-4F14-9881-1241A77A40DF}"/>
+              </a:ext>
+            </a:extLst>
+          </p:cNvPr>
+          <p:cNvSpPr>
+            <a:spLocks xmlns:a="http://schemas.openxmlformats.org/drawingml/2006/main" noGrp="1"/>
+          </p:cNvSpPr>
+          <p:nvPr/>
+        </p:nvSpPr>
+        <p:spPr>
+          <a:xfrm xmlns:a="http://schemas.openxmlformats.org/drawingml/2006/main">
+            <a:off x="1714500" y="4743450"/>
+            <a:ext cx="9525000" cy="809625"/>
           </a:xfrm>
           <a:prstGeom xmlns:a="http://schemas.openxmlformats.org/drawingml/2006/main" prst="rect">
             <a:avLst/>
@@ -8815,7 +8823,7 @@
           <a:lstStyle xmlns:a="http://schemas.openxmlformats.org/drawingml/2006/main"/>
           <a:p xmlns:a="http://schemas.openxmlformats.org/drawingml/2006/main">
             <a:pPr algn="l">
-              <a:defRPr sz="1500" b="1">
+              <a:defRPr sz="1725" b="1">
                 <a:solidFill>
                   <a:srgbClr val="2F785D"/>
                 </a:solidFill>
@@ -8825,7 +8833,7 @@
               </a:defRPr>
             </a:pPr>
             <a:r>
-              <a:rPr sz="1500" b="1">
+              <a:rPr sz="1725" b="1">
                 <a:solidFill>
                   <a:srgbClr val="2F785D"/>
                 </a:solidFill>
@@ -8833,7 +8841,7 @@
                 <a:ea typeface="Arial"/>
                 <a:cs typeface="Arial"/>
               </a:rPr>
-              <a:t>Check the result: Check side lengths and orientation after the transformation.</a:t>
+              <a:t>A lies in Quadrant II</a:t>
             </a:r>
           </a:p>
         </p:txBody>
@@ -8841,7 +8849,7 @@
     </p:spTree>
     <p:extLst>
       <p:ext uri="{BB962C8B-B14F-4D97-AF65-F5344CB8AC3E}">
-        <p14:creationId xmlns:p14="http://schemas.microsoft.com/office/powerpoint/2010/main" val="980241216"/>
+        <p14:creationId xmlns:p14="http://schemas.microsoft.com/office/powerpoint/2010/main" val="2101509513"/>
       </p:ext>
     </p:extLst>
   </p:cSld>
@@ -9134,7 +9142,7 @@
           <p:cNvPr id="15" name="">
             <a:extLst xmlns:a="http://schemas.openxmlformats.org/drawingml/2006/main">
               <a:ext uri="{FF2B5EF4-FFF2-40B4-BE49-F238E27FC236}">
-                <a16:creationId xmlns:a16="http://schemas.microsoft.com/office/drawing/2014/main" id="{B32A1A26-B46B-4BC5-8225-5224C77A5D56}"/>
+                <a16:creationId xmlns:a16="http://schemas.microsoft.com/office/drawing/2014/main" id="{A1ACF35B-9170-4738-B17E-3EC00577C5E2}"/>
               </a:ext>
             </a:extLst>
           </p:cNvPr>
@@ -9166,7 +9174,7 @@
           <p:cNvPr id="2" name="">
             <a:extLst xmlns:a="http://schemas.openxmlformats.org/drawingml/2006/main">
               <a:ext uri="{FF2B5EF4-FFF2-40B4-BE49-F238E27FC236}">
-                <a16:creationId xmlns:a16="http://schemas.microsoft.com/office/drawing/2014/main" id="{2EE3E2DF-B94C-48AB-8076-ACBAAC69403B}"/>
+                <a16:creationId xmlns:a16="http://schemas.microsoft.com/office/drawing/2014/main" id="{7FA89954-32AE-4E80-8B3E-FCF4EAF29B28}"/>
               </a:ext>
             </a:extLst>
           </p:cNvPr>
@@ -9223,7 +9231,7 @@
           <p:cNvPr id="3" name="">
             <a:extLst xmlns:a="http://schemas.openxmlformats.org/drawingml/2006/main">
               <a:ext uri="{FF2B5EF4-FFF2-40B4-BE49-F238E27FC236}">
-                <a16:creationId xmlns:a16="http://schemas.microsoft.com/office/drawing/2014/main" id="{0B430AF9-CA16-4121-A327-7CB96A913D8A}"/>
+                <a16:creationId xmlns:a16="http://schemas.microsoft.com/office/drawing/2014/main" id="{749387E8-27CF-4CF2-9549-8660672035BA}"/>
               </a:ext>
             </a:extLst>
           </p:cNvPr>
@@ -9255,7 +9263,7 @@
           <p:cNvPr id="4" name="">
             <a:extLst xmlns:a="http://schemas.openxmlformats.org/drawingml/2006/main">
               <a:ext uri="{FF2B5EF4-FFF2-40B4-BE49-F238E27FC236}">
-                <a16:creationId xmlns:a16="http://schemas.microsoft.com/office/drawing/2014/main" id="{AF64312C-16E4-43A8-9C0B-4EDA17AAFA59}"/>
+                <a16:creationId xmlns:a16="http://schemas.microsoft.com/office/drawing/2014/main" id="{4391ED04-B611-4393-BB18-C1AE30E98CE4}"/>
               </a:ext>
             </a:extLst>
           </p:cNvPr>
@@ -9312,7 +9320,7 @@
           <p:cNvPr id="5" name="">
             <a:extLst xmlns:a="http://schemas.openxmlformats.org/drawingml/2006/main">
               <a:ext uri="{FF2B5EF4-FFF2-40B4-BE49-F238E27FC236}">
-                <a16:creationId xmlns:a16="http://schemas.microsoft.com/office/drawing/2014/main" id="{8A4774B7-080F-4D08-BE48-6C99C659BDE0}"/>
+                <a16:creationId xmlns:a16="http://schemas.microsoft.com/office/drawing/2014/main" id="{7455E449-7B80-44E1-8629-B72F029281E9}"/>
               </a:ext>
             </a:extLst>
           </p:cNvPr>
@@ -9369,7 +9377,7 @@
           <p:cNvPr id="6" name="">
             <a:extLst xmlns:a="http://schemas.openxmlformats.org/drawingml/2006/main">
               <a:ext uri="{FF2B5EF4-FFF2-40B4-BE49-F238E27FC236}">
-                <a16:creationId xmlns:a16="http://schemas.microsoft.com/office/drawing/2014/main" id="{082AE334-AFCE-498F-9450-454B5FDC0578}"/>
+                <a16:creationId xmlns:a16="http://schemas.microsoft.com/office/drawing/2014/main" id="{2B24C126-0B5F-4E13-8B92-3D09C00DEE46}"/>
               </a:ext>
             </a:extLst>
           </p:cNvPr>
@@ -9426,7 +9434,7 @@
           <p:cNvPr id="7" name="">
             <a:extLst xmlns:a="http://schemas.openxmlformats.org/drawingml/2006/main">
               <a:ext uri="{FF2B5EF4-FFF2-40B4-BE49-F238E27FC236}">
-                <a16:creationId xmlns:a16="http://schemas.microsoft.com/office/drawing/2014/main" id="{A4D54937-EFA0-46CE-8CFD-3B33DE075A22}"/>
+                <a16:creationId xmlns:a16="http://schemas.microsoft.com/office/drawing/2014/main" id="{6AC9EC79-8F5E-403B-9893-BD443D32A651}"/>
               </a:ext>
             </a:extLst>
           </p:cNvPr>
@@ -9458,7 +9466,7 @@
           <p:cNvPr id="8" name="">
             <a:extLst xmlns:a="http://schemas.openxmlformats.org/drawingml/2006/main">
               <a:ext uri="{FF2B5EF4-FFF2-40B4-BE49-F238E27FC236}">
-                <a16:creationId xmlns:a16="http://schemas.microsoft.com/office/drawing/2014/main" id="{5B074627-6677-4177-93A0-91EF7B629901}"/>
+                <a16:creationId xmlns:a16="http://schemas.microsoft.com/office/drawing/2014/main" id="{5A59BC3A-54D6-4E42-A625-F3A60D6B0765}"/>
               </a:ext>
             </a:extLst>
           </p:cNvPr>
@@ -9515,7 +9523,7 @@
           <p:cNvPr id="9" name="">
             <a:extLst xmlns:a="http://schemas.openxmlformats.org/drawingml/2006/main">
               <a:ext uri="{FF2B5EF4-FFF2-40B4-BE49-F238E27FC236}">
-                <a16:creationId xmlns:a16="http://schemas.microsoft.com/office/drawing/2014/main" id="{11BE8FBD-C439-4FD4-949A-FD0472C0243D}"/>
+                <a16:creationId xmlns:a16="http://schemas.microsoft.com/office/drawing/2014/main" id="{E7A6A960-79F6-4037-84D0-943875D2955B}"/>
               </a:ext>
             </a:extLst>
           </p:cNvPr>
@@ -9572,7 +9580,7 @@
           <p:cNvPr id="10" name="">
             <a:extLst xmlns:a="http://schemas.openxmlformats.org/drawingml/2006/main">
               <a:ext uri="{FF2B5EF4-FFF2-40B4-BE49-F238E27FC236}">
-                <a16:creationId xmlns:a16="http://schemas.microsoft.com/office/drawing/2014/main" id="{0C1ED370-016A-48B5-9337-A41CE9ACF96F}"/>
+                <a16:creationId xmlns:a16="http://schemas.microsoft.com/office/drawing/2014/main" id="{747497BC-0820-4514-89CF-499CD181FF3D}"/>
               </a:ext>
             </a:extLst>
           </p:cNvPr>
@@ -9629,7 +9637,7 @@
           <p:cNvPr id="11" name="">
             <a:extLst xmlns:a="http://schemas.openxmlformats.org/drawingml/2006/main">
               <a:ext uri="{FF2B5EF4-FFF2-40B4-BE49-F238E27FC236}">
-                <a16:creationId xmlns:a16="http://schemas.microsoft.com/office/drawing/2014/main" id="{A89CBCE3-91EB-46E9-866C-18587CBFF0F5}"/>
+                <a16:creationId xmlns:a16="http://schemas.microsoft.com/office/drawing/2014/main" id="{F6A77098-B250-4303-A6A4-9F6D44836C7F}"/>
               </a:ext>
             </a:extLst>
           </p:cNvPr>
@@ -9686,7 +9694,7 @@
           <p:cNvPr id="12" name="">
             <a:extLst xmlns:a="http://schemas.openxmlformats.org/drawingml/2006/main">
               <a:ext uri="{FF2B5EF4-FFF2-40B4-BE49-F238E27FC236}">
-                <a16:creationId xmlns:a16="http://schemas.microsoft.com/office/drawing/2014/main" id="{2CAF6205-2E60-4ED0-9242-2B5D4E2854E4}"/>
+                <a16:creationId xmlns:a16="http://schemas.microsoft.com/office/drawing/2014/main" id="{C786973E-3A0F-4F39-988E-593DE4CCB5D7}"/>
               </a:ext>
             </a:extLst>
           </p:cNvPr>
@@ -9718,7 +9726,7 @@
           <p:cNvPr id="13" name="">
             <a:extLst xmlns:a="http://schemas.openxmlformats.org/drawingml/2006/main">
               <a:ext uri="{FF2B5EF4-FFF2-40B4-BE49-F238E27FC236}">
-                <a16:creationId xmlns:a16="http://schemas.microsoft.com/office/drawing/2014/main" id="{6BA2C2FC-FF5A-408D-806C-C791EB8A60D8}"/>
+                <a16:creationId xmlns:a16="http://schemas.microsoft.com/office/drawing/2014/main" id="{9E9E30D6-AEC5-4D5D-89DD-BB5298D2C45C}"/>
               </a:ext>
             </a:extLst>
           </p:cNvPr>
@@ -9775,7 +9783,7 @@
           <p:cNvPr id="14" name="">
             <a:extLst xmlns:a="http://schemas.openxmlformats.org/drawingml/2006/main">
               <a:ext uri="{FF2B5EF4-FFF2-40B4-BE49-F238E27FC236}">
-                <a16:creationId xmlns:a16="http://schemas.microsoft.com/office/drawing/2014/main" id="{3E2B0D4E-A946-49DE-8D9C-D94AABAC4C0A}"/>
+                <a16:creationId xmlns:a16="http://schemas.microsoft.com/office/drawing/2014/main" id="{733A413D-6F56-4999-83FD-EBF9C20FF369}"/>
               </a:ext>
             </a:extLst>
           </p:cNvPr>
@@ -9830,7 +9838,7 @@
     </p:spTree>
     <p:extLst>
       <p:ext uri="{BB962C8B-B14F-4D97-AF65-F5344CB8AC3E}">
-        <p14:creationId xmlns:p14="http://schemas.microsoft.com/office/powerpoint/2010/main" val="2063544266"/>
+        <p14:creationId xmlns:p14="http://schemas.microsoft.com/office/powerpoint/2010/main" val="486458671"/>
       </p:ext>
     </p:extLst>
   </p:cSld>
@@ -10031,7 +10039,7 @@
           <p:cNvPr id="16" name="">
             <a:extLst xmlns:a="http://schemas.openxmlformats.org/drawingml/2006/main">
               <a:ext uri="{FF2B5EF4-FFF2-40B4-BE49-F238E27FC236}">
-                <a16:creationId xmlns:a16="http://schemas.microsoft.com/office/drawing/2014/main" id="{9C3BEE3F-19FD-4A44-B522-E39E84505DE1}"/>
+                <a16:creationId xmlns:a16="http://schemas.microsoft.com/office/drawing/2014/main" id="{C65200BB-EF01-447E-91D0-A3935C176E44}"/>
               </a:ext>
             </a:extLst>
           </p:cNvPr>
@@ -10063,7 +10071,7 @@
           <p:cNvPr id="2" name="">
             <a:extLst xmlns:a="http://schemas.openxmlformats.org/drawingml/2006/main">
               <a:ext uri="{FF2B5EF4-FFF2-40B4-BE49-F238E27FC236}">
-                <a16:creationId xmlns:a16="http://schemas.microsoft.com/office/drawing/2014/main" id="{5AE3B000-3058-4AE9-BFBF-FF3DEB336B06}"/>
+                <a16:creationId xmlns:a16="http://schemas.microsoft.com/office/drawing/2014/main" id="{5995504B-48FF-4173-B765-C9FBC395C198}"/>
               </a:ext>
             </a:extLst>
           </p:cNvPr>
@@ -10120,7 +10128,7 @@
           <p:cNvPr id="3" name="">
             <a:extLst xmlns:a="http://schemas.openxmlformats.org/drawingml/2006/main">
               <a:ext uri="{FF2B5EF4-FFF2-40B4-BE49-F238E27FC236}">
-                <a16:creationId xmlns:a16="http://schemas.microsoft.com/office/drawing/2014/main" id="{7E3BB551-B966-4E8B-95D1-EC6322338211}"/>
+                <a16:creationId xmlns:a16="http://schemas.microsoft.com/office/drawing/2014/main" id="{EBAAB268-1E5B-4FA2-83B6-E86C45BC9673}"/>
               </a:ext>
             </a:extLst>
           </p:cNvPr>
@@ -10152,7 +10160,7 @@
           <p:cNvPr id="4" name="">
             <a:extLst xmlns:a="http://schemas.openxmlformats.org/drawingml/2006/main">
               <a:ext uri="{FF2B5EF4-FFF2-40B4-BE49-F238E27FC236}">
-                <a16:creationId xmlns:a16="http://schemas.microsoft.com/office/drawing/2014/main" id="{F84D9EB8-E5F0-41E8-BE48-3F34577C7519}"/>
+                <a16:creationId xmlns:a16="http://schemas.microsoft.com/office/drawing/2014/main" id="{8F4FDDB6-30BE-4FF0-96F3-632D8E4937C8}"/>
               </a:ext>
             </a:extLst>
           </p:cNvPr>
@@ -10209,7 +10217,7 @@
           <p:cNvPr id="5" name="">
             <a:extLst xmlns:a="http://schemas.openxmlformats.org/drawingml/2006/main">
               <a:ext uri="{FF2B5EF4-FFF2-40B4-BE49-F238E27FC236}">
-                <a16:creationId xmlns:a16="http://schemas.microsoft.com/office/drawing/2014/main" id="{E58D0B0E-060B-4CC8-952A-A5ACE7F7FCCB}"/>
+                <a16:creationId xmlns:a16="http://schemas.microsoft.com/office/drawing/2014/main" id="{0CCFBB44-CFFD-4904-868E-575F0C1D5B5C}"/>
               </a:ext>
             </a:extLst>
           </p:cNvPr>
@@ -10266,7 +10274,7 @@
           <p:cNvPr id="6" name="">
             <a:extLst xmlns:a="http://schemas.openxmlformats.org/drawingml/2006/main">
               <a:ext uri="{FF2B5EF4-FFF2-40B4-BE49-F238E27FC236}">
-                <a16:creationId xmlns:a16="http://schemas.microsoft.com/office/drawing/2014/main" id="{77ECBE6C-E0FF-4DFF-BE70-16CFE7AE7BC4}"/>
+                <a16:creationId xmlns:a16="http://schemas.microsoft.com/office/drawing/2014/main" id="{C6FD74AA-C84A-473D-9AA6-457CD6A67E31}"/>
               </a:ext>
             </a:extLst>
           </p:cNvPr>
@@ -10323,7 +10331,7 @@
           <p:cNvPr id="7" name="">
             <a:extLst xmlns:a="http://schemas.openxmlformats.org/drawingml/2006/main">
               <a:ext uri="{FF2B5EF4-FFF2-40B4-BE49-F238E27FC236}">
-                <a16:creationId xmlns:a16="http://schemas.microsoft.com/office/drawing/2014/main" id="{5312F340-2D83-4397-AAA7-7E3A717F1379}"/>
+                <a16:creationId xmlns:a16="http://schemas.microsoft.com/office/drawing/2014/main" id="{ACA0149B-5FD6-4D67-B595-9D3407C53822}"/>
               </a:ext>
             </a:extLst>
           </p:cNvPr>
@@ -10355,7 +10363,7 @@
           <p:cNvPr id="8" name="">
             <a:extLst xmlns:a="http://schemas.openxmlformats.org/drawingml/2006/main">
               <a:ext uri="{FF2B5EF4-FFF2-40B4-BE49-F238E27FC236}">
-                <a16:creationId xmlns:a16="http://schemas.microsoft.com/office/drawing/2014/main" id="{D69C5763-1896-4804-AD72-46623C5272D9}"/>
+                <a16:creationId xmlns:a16="http://schemas.microsoft.com/office/drawing/2014/main" id="{0EFD8212-D3DC-40F8-AA18-82164DE24D56}"/>
               </a:ext>
             </a:extLst>
           </p:cNvPr>
@@ -10412,7 +10420,7 @@
           <p:cNvPr id="9" name="">
             <a:extLst xmlns:a="http://schemas.openxmlformats.org/drawingml/2006/main">
               <a:ext uri="{FF2B5EF4-FFF2-40B4-BE49-F238E27FC236}">
-                <a16:creationId xmlns:a16="http://schemas.microsoft.com/office/drawing/2014/main" id="{C45C8C10-05A7-4F84-9C98-C314C5548A2C}"/>
+                <a16:creationId xmlns:a16="http://schemas.microsoft.com/office/drawing/2014/main" id="{8C313699-1A08-4B65-8133-5830C253E4C1}"/>
               </a:ext>
             </a:extLst>
           </p:cNvPr>
@@ -10469,7 +10477,7 @@
           <p:cNvPr id="10" name="">
             <a:extLst xmlns:a="http://schemas.openxmlformats.org/drawingml/2006/main">
               <a:ext uri="{FF2B5EF4-FFF2-40B4-BE49-F238E27FC236}">
-                <a16:creationId xmlns:a16="http://schemas.microsoft.com/office/drawing/2014/main" id="{D600943E-C96B-467C-BC42-2D5006DFAD74}"/>
+                <a16:creationId xmlns:a16="http://schemas.microsoft.com/office/drawing/2014/main" id="{33713A33-62E2-4A2A-A88E-6A74F9699FB2}"/>
               </a:ext>
             </a:extLst>
           </p:cNvPr>
@@ -10526,7 +10534,7 @@
           <p:cNvPr id="11" name="">
             <a:extLst xmlns:a="http://schemas.openxmlformats.org/drawingml/2006/main">
               <a:ext uri="{FF2B5EF4-FFF2-40B4-BE49-F238E27FC236}">
-                <a16:creationId xmlns:a16="http://schemas.microsoft.com/office/drawing/2014/main" id="{EA990B45-593C-41BA-9A64-8F648FDC9D5B}"/>
+                <a16:creationId xmlns:a16="http://schemas.microsoft.com/office/drawing/2014/main" id="{9FBA2816-E168-49D2-AD91-669973EC0C2F}"/>
               </a:ext>
             </a:extLst>
           </p:cNvPr>
@@ -10583,7 +10591,7 @@
           <p:cNvPr id="12" name="">
             <a:extLst xmlns:a="http://schemas.openxmlformats.org/drawingml/2006/main">
               <a:ext uri="{FF2B5EF4-FFF2-40B4-BE49-F238E27FC236}">
-                <a16:creationId xmlns:a16="http://schemas.microsoft.com/office/drawing/2014/main" id="{2AC87D41-F9C0-450F-9675-B95BBC3AB44B}"/>
+                <a16:creationId xmlns:a16="http://schemas.microsoft.com/office/drawing/2014/main" id="{CC6653D9-A504-4408-A95E-C053973067F7}"/>
               </a:ext>
             </a:extLst>
           </p:cNvPr>
@@ -10640,7 +10648,7 @@
           <p:cNvPr id="13" name="">
             <a:extLst xmlns:a="http://schemas.openxmlformats.org/drawingml/2006/main">
               <a:ext uri="{FF2B5EF4-FFF2-40B4-BE49-F238E27FC236}">
-                <a16:creationId xmlns:a16="http://schemas.microsoft.com/office/drawing/2014/main" id="{74259BC1-1C87-4B65-91B0-DC55E6369DAB}"/>
+                <a16:creationId xmlns:a16="http://schemas.microsoft.com/office/drawing/2014/main" id="{E9526A18-6610-4083-913E-D7754A4B6EEA}"/>
               </a:ext>
             </a:extLst>
           </p:cNvPr>
@@ -10697,7 +10705,7 @@
           <p:cNvPr id="14" name="">
             <a:extLst xmlns:a="http://schemas.openxmlformats.org/drawingml/2006/main">
               <a:ext uri="{FF2B5EF4-FFF2-40B4-BE49-F238E27FC236}">
-                <a16:creationId xmlns:a16="http://schemas.microsoft.com/office/drawing/2014/main" id="{4BE1744F-DA61-46AD-865C-1FA7E73F1E76}"/>
+                <a16:creationId xmlns:a16="http://schemas.microsoft.com/office/drawing/2014/main" id="{40E0AB6A-05C0-4B7D-9F60-1C12DD7802CA}"/>
               </a:ext>
             </a:extLst>
           </p:cNvPr>
@@ -10754,7 +10762,7 @@
           <p:cNvPr id="15" name="">
             <a:extLst xmlns:a="http://schemas.openxmlformats.org/drawingml/2006/main">
               <a:ext uri="{FF2B5EF4-FFF2-40B4-BE49-F238E27FC236}">
-                <a16:creationId xmlns:a16="http://schemas.microsoft.com/office/drawing/2014/main" id="{1CB69AC7-7ED4-449E-819F-E5487AFA1890}"/>
+                <a16:creationId xmlns:a16="http://schemas.microsoft.com/office/drawing/2014/main" id="{3265CA81-69F7-48A3-BB30-E496E8F0331A}"/>
               </a:ext>
             </a:extLst>
           </p:cNvPr>
@@ -10809,7 +10817,7 @@
     </p:spTree>
     <p:extLst>
       <p:ext uri="{BB962C8B-B14F-4D97-AF65-F5344CB8AC3E}">
-        <p14:creationId xmlns:p14="http://schemas.microsoft.com/office/powerpoint/2010/main" val="1793703252"/>
+        <p14:creationId xmlns:p14="http://schemas.microsoft.com/office/powerpoint/2010/main" val="2045485871"/>
       </p:ext>
     </p:extLst>
   </p:cSld>
@@ -10964,7 +10972,7 @@
           <p:cNvPr id="16" name="">
             <a:extLst xmlns:a="http://schemas.openxmlformats.org/drawingml/2006/main">
               <a:ext uri="{FF2B5EF4-FFF2-40B4-BE49-F238E27FC236}">
-                <a16:creationId xmlns:a16="http://schemas.microsoft.com/office/drawing/2014/main" id="{85519788-7177-4A3B-B67E-38F35A350DFD}"/>
+                <a16:creationId xmlns:a16="http://schemas.microsoft.com/office/drawing/2014/main" id="{C023E1F6-F8E4-4E28-A682-5FEA0449C0B7}"/>
               </a:ext>
             </a:extLst>
           </p:cNvPr>
@@ -10996,7 +11004,7 @@
           <p:cNvPr id="2" name="">
             <a:extLst xmlns:a="http://schemas.openxmlformats.org/drawingml/2006/main">
               <a:ext uri="{FF2B5EF4-FFF2-40B4-BE49-F238E27FC236}">
-                <a16:creationId xmlns:a16="http://schemas.microsoft.com/office/drawing/2014/main" id="{6C5E1E1A-78C9-4DCE-9AF1-023CE7DA3DA5}"/>
+                <a16:creationId xmlns:a16="http://schemas.microsoft.com/office/drawing/2014/main" id="{9634FDBF-EEAA-4674-9C55-38755ABDE80C}"/>
               </a:ext>
             </a:extLst>
           </p:cNvPr>
@@ -11053,7 +11061,7 @@
           <p:cNvPr id="3" name="">
             <a:extLst xmlns:a="http://schemas.openxmlformats.org/drawingml/2006/main">
               <a:ext uri="{FF2B5EF4-FFF2-40B4-BE49-F238E27FC236}">
-                <a16:creationId xmlns:a16="http://schemas.microsoft.com/office/drawing/2014/main" id="{05EC2B3E-B8E3-4A9C-BA89-59BC2F668AB2}"/>
+                <a16:creationId xmlns:a16="http://schemas.microsoft.com/office/drawing/2014/main" id="{82733D5B-BD53-4BBB-BEC0-16E273C1DF8F}"/>
               </a:ext>
             </a:extLst>
           </p:cNvPr>
@@ -11085,7 +11093,7 @@
           <p:cNvPr id="4" name="">
             <a:extLst xmlns:a="http://schemas.openxmlformats.org/drawingml/2006/main">
               <a:ext uri="{FF2B5EF4-FFF2-40B4-BE49-F238E27FC236}">
-                <a16:creationId xmlns:a16="http://schemas.microsoft.com/office/drawing/2014/main" id="{B03A7A48-0CAD-49C6-9057-6C288B021820}"/>
+                <a16:creationId xmlns:a16="http://schemas.microsoft.com/office/drawing/2014/main" id="{9D0472C3-D7DB-4299-8C66-39DB58B4C186}"/>
               </a:ext>
             </a:extLst>
           </p:cNvPr>
@@ -11142,7 +11150,7 @@
           <p:cNvPr id="5" name="">
             <a:extLst xmlns:a="http://schemas.openxmlformats.org/drawingml/2006/main">
               <a:ext uri="{FF2B5EF4-FFF2-40B4-BE49-F238E27FC236}">
-                <a16:creationId xmlns:a16="http://schemas.microsoft.com/office/drawing/2014/main" id="{A6A268A0-BB17-496B-A7A9-F54E49E67AA7}"/>
+                <a16:creationId xmlns:a16="http://schemas.microsoft.com/office/drawing/2014/main" id="{24A48D8E-AA32-4D8C-8919-ECD7B10C9C04}"/>
               </a:ext>
             </a:extLst>
           </p:cNvPr>
@@ -11199,7 +11207,7 @@
           <p:cNvPr id="6" name="">
             <a:extLst xmlns:a="http://schemas.openxmlformats.org/drawingml/2006/main">
               <a:ext uri="{FF2B5EF4-FFF2-40B4-BE49-F238E27FC236}">
-                <a16:creationId xmlns:a16="http://schemas.microsoft.com/office/drawing/2014/main" id="{B4F06868-93AC-44AA-965C-461E446D2992}"/>
+                <a16:creationId xmlns:a16="http://schemas.microsoft.com/office/drawing/2014/main" id="{338DDE1F-B6E9-43CC-B19C-333AF5A6FD6A}"/>
               </a:ext>
             </a:extLst>
           </p:cNvPr>
@@ -11256,7 +11264,7 @@
           <p:cNvPr id="7" name="">
             <a:extLst xmlns:a="http://schemas.openxmlformats.org/drawingml/2006/main">
               <a:ext uri="{FF2B5EF4-FFF2-40B4-BE49-F238E27FC236}">
-                <a16:creationId xmlns:a16="http://schemas.microsoft.com/office/drawing/2014/main" id="{5557D440-F3BC-418D-82D5-FB16ED1109DB}"/>
+                <a16:creationId xmlns:a16="http://schemas.microsoft.com/office/drawing/2014/main" id="{0970236E-5E3B-4F24-995D-B908EB15A53E}"/>
               </a:ext>
             </a:extLst>
           </p:cNvPr>
@@ -11288,7 +11296,7 @@
           <p:cNvPr id="8" name="">
             <a:extLst xmlns:a="http://schemas.openxmlformats.org/drawingml/2006/main">
               <a:ext uri="{FF2B5EF4-FFF2-40B4-BE49-F238E27FC236}">
-                <a16:creationId xmlns:a16="http://schemas.microsoft.com/office/drawing/2014/main" id="{10D7C3EB-22D8-4EC2-9EF7-A137129F804B}"/>
+                <a16:creationId xmlns:a16="http://schemas.microsoft.com/office/drawing/2014/main" id="{DB4962EE-7B37-44B7-84EF-ECB794F27B5A}"/>
               </a:ext>
             </a:extLst>
           </p:cNvPr>
@@ -11345,7 +11353,7 @@
           <p:cNvPr id="9" name="">
             <a:extLst xmlns:a="http://schemas.openxmlformats.org/drawingml/2006/main">
               <a:ext uri="{FF2B5EF4-FFF2-40B4-BE49-F238E27FC236}">
-                <a16:creationId xmlns:a16="http://schemas.microsoft.com/office/drawing/2014/main" id="{0627B93C-5AB6-4695-8802-87787ED82B0C}"/>
+                <a16:creationId xmlns:a16="http://schemas.microsoft.com/office/drawing/2014/main" id="{45E2C88C-F70E-4BA4-A137-D37E9CC67C4F}"/>
               </a:ext>
             </a:extLst>
           </p:cNvPr>
@@ -11406,7 +11414,7 @@
           <p:nvPr/>
         </p:nvPicPr>
         <p:blipFill>
-          <a:blip xmlns:r="http://schemas.openxmlformats.org/officeDocument/2006/relationships" xmlns:a="http://schemas.openxmlformats.org/drawingml/2006/main" r:embed="Rc7472ef4f14a4da7"/>
+          <a:blip xmlns:r="http://schemas.openxmlformats.org/officeDocument/2006/relationships" xmlns:a="http://schemas.openxmlformats.org/drawingml/2006/main" r:embed="R21bce24d5e434749"/>
           <a:stretch xmlns:a="http://schemas.openxmlformats.org/drawingml/2006/main"/>
         </p:blipFill>
         <p:spPr>
@@ -11424,7 +11432,7 @@
           <p:cNvPr id="11" name="">
             <a:extLst xmlns:a="http://schemas.openxmlformats.org/drawingml/2006/main">
               <a:ext uri="{FF2B5EF4-FFF2-40B4-BE49-F238E27FC236}">
-                <a16:creationId xmlns:a16="http://schemas.microsoft.com/office/drawing/2014/main" id="{81D1157A-804E-4615-B6FE-4F5F16657488}"/>
+                <a16:creationId xmlns:a16="http://schemas.microsoft.com/office/drawing/2014/main" id="{113CE818-4990-4F6C-9B4A-05101DCA8E9E}"/>
               </a:ext>
             </a:extLst>
           </p:cNvPr>
@@ -11481,7 +11489,7 @@
           <p:cNvPr id="12" name="">
             <a:extLst xmlns:a="http://schemas.openxmlformats.org/drawingml/2006/main">
               <a:ext uri="{FF2B5EF4-FFF2-40B4-BE49-F238E27FC236}">
-                <a16:creationId xmlns:a16="http://schemas.microsoft.com/office/drawing/2014/main" id="{20DBE66D-79E8-4F53-8DC3-85A6958FB3FE}"/>
+                <a16:creationId xmlns:a16="http://schemas.microsoft.com/office/drawing/2014/main" id="{B60B1E46-A12D-473D-9AC4-D46F00CE9F22}"/>
               </a:ext>
             </a:extLst>
           </p:cNvPr>
@@ -11538,7 +11546,7 @@
           <p:cNvPr id="13" name="">
             <a:extLst xmlns:a="http://schemas.openxmlformats.org/drawingml/2006/main">
               <a:ext uri="{FF2B5EF4-FFF2-40B4-BE49-F238E27FC236}">
-                <a16:creationId xmlns:a16="http://schemas.microsoft.com/office/drawing/2014/main" id="{15015F52-68D2-4821-85F3-468603310330}"/>
+                <a16:creationId xmlns:a16="http://schemas.microsoft.com/office/drawing/2014/main" id="{1173CD8F-6E58-462C-8FDA-5830F4EAE21C}"/>
               </a:ext>
             </a:extLst>
           </p:cNvPr>
@@ -11570,7 +11578,7 @@
           <p:cNvPr id="14" name="">
             <a:extLst xmlns:a="http://schemas.openxmlformats.org/drawingml/2006/main">
               <a:ext uri="{FF2B5EF4-FFF2-40B4-BE49-F238E27FC236}">
-                <a16:creationId xmlns:a16="http://schemas.microsoft.com/office/drawing/2014/main" id="{C847CCE1-804A-4265-AA9A-8C39A13DC3F2}"/>
+                <a16:creationId xmlns:a16="http://schemas.microsoft.com/office/drawing/2014/main" id="{507BA1D2-4342-43C1-92B9-E14424BA7CA7}"/>
               </a:ext>
             </a:extLst>
           </p:cNvPr>
@@ -11627,7 +11635,7 @@
           <p:cNvPr id="15" name="">
             <a:extLst xmlns:a="http://schemas.openxmlformats.org/drawingml/2006/main">
               <a:ext uri="{FF2B5EF4-FFF2-40B4-BE49-F238E27FC236}">
-                <a16:creationId xmlns:a16="http://schemas.microsoft.com/office/drawing/2014/main" id="{26210A78-C79E-4DCF-9B39-A0225C2349B6}"/>
+                <a16:creationId xmlns:a16="http://schemas.microsoft.com/office/drawing/2014/main" id="{7FB7D353-8CF8-4B16-9894-B0C5C2F9ADE4}"/>
               </a:ext>
             </a:extLst>
           </p:cNvPr>
@@ -11682,7 +11690,7 @@
     </p:spTree>
     <p:extLst>
       <p:ext uri="{BB962C8B-B14F-4D97-AF65-F5344CB8AC3E}">
-        <p14:creationId xmlns:p14="http://schemas.microsoft.com/office/powerpoint/2010/main" val="1979639498"/>
+        <p14:creationId xmlns:p14="http://schemas.microsoft.com/office/powerpoint/2010/main" val="1702089216"/>
       </p:ext>
     </p:extLst>
   </p:cSld>
@@ -11837,7 +11845,7 @@
           <p:cNvPr id="23" name="">
             <a:extLst xmlns:a="http://schemas.openxmlformats.org/drawingml/2006/main">
               <a:ext uri="{FF2B5EF4-FFF2-40B4-BE49-F238E27FC236}">
-                <a16:creationId xmlns:a16="http://schemas.microsoft.com/office/drawing/2014/main" id="{21215A1D-F6C0-4A04-B2DA-3EE258B7DFD7}"/>
+                <a16:creationId xmlns:a16="http://schemas.microsoft.com/office/drawing/2014/main" id="{D82A0A29-36EA-4B5F-A8EE-D8C759138703}"/>
               </a:ext>
             </a:extLst>
           </p:cNvPr>
@@ -11869,7 +11877,7 @@
           <p:cNvPr id="2" name="">
             <a:extLst xmlns:a="http://schemas.openxmlformats.org/drawingml/2006/main">
               <a:ext uri="{FF2B5EF4-FFF2-40B4-BE49-F238E27FC236}">
-                <a16:creationId xmlns:a16="http://schemas.microsoft.com/office/drawing/2014/main" id="{79B72615-00D3-4203-A5AB-CFEE6C3CE0F2}"/>
+                <a16:creationId xmlns:a16="http://schemas.microsoft.com/office/drawing/2014/main" id="{DAA342D5-781F-496E-9540-5E7BEC75CCB0}"/>
               </a:ext>
             </a:extLst>
           </p:cNvPr>
@@ -11926,7 +11934,7 @@
           <p:cNvPr id="3" name="">
             <a:extLst xmlns:a="http://schemas.openxmlformats.org/drawingml/2006/main">
               <a:ext uri="{FF2B5EF4-FFF2-40B4-BE49-F238E27FC236}">
-                <a16:creationId xmlns:a16="http://schemas.microsoft.com/office/drawing/2014/main" id="{9B22EF7E-8165-4C94-A25A-F15B138F31D4}"/>
+                <a16:creationId xmlns:a16="http://schemas.microsoft.com/office/drawing/2014/main" id="{6F327038-D86E-427D-B503-F213F55F349B}"/>
               </a:ext>
             </a:extLst>
           </p:cNvPr>
@@ -11958,7 +11966,7 @@
           <p:cNvPr id="4" name="">
             <a:extLst xmlns:a="http://schemas.openxmlformats.org/drawingml/2006/main">
               <a:ext uri="{FF2B5EF4-FFF2-40B4-BE49-F238E27FC236}">
-                <a16:creationId xmlns:a16="http://schemas.microsoft.com/office/drawing/2014/main" id="{7FF33749-8A2B-4198-BD08-A94B8CBC1913}"/>
+                <a16:creationId xmlns:a16="http://schemas.microsoft.com/office/drawing/2014/main" id="{CBA35942-9466-4672-B62D-82AF4E40D204}"/>
               </a:ext>
             </a:extLst>
           </p:cNvPr>
@@ -12015,7 +12023,7 @@
           <p:cNvPr id="5" name="">
             <a:extLst xmlns:a="http://schemas.openxmlformats.org/drawingml/2006/main">
               <a:ext uri="{FF2B5EF4-FFF2-40B4-BE49-F238E27FC236}">
-                <a16:creationId xmlns:a16="http://schemas.microsoft.com/office/drawing/2014/main" id="{58A5E218-8373-438B-995B-AC6E62B81252}"/>
+                <a16:creationId xmlns:a16="http://schemas.microsoft.com/office/drawing/2014/main" id="{F1D6D4A5-D3FB-4900-B790-0F38973A1833}"/>
               </a:ext>
             </a:extLst>
           </p:cNvPr>
@@ -12072,7 +12080,7 @@
           <p:cNvPr id="6" name="">
             <a:extLst xmlns:a="http://schemas.openxmlformats.org/drawingml/2006/main">
               <a:ext uri="{FF2B5EF4-FFF2-40B4-BE49-F238E27FC236}">
-                <a16:creationId xmlns:a16="http://schemas.microsoft.com/office/drawing/2014/main" id="{F4BDAF9A-3222-4D81-99E2-C9BACEC33D8F}"/>
+                <a16:creationId xmlns:a16="http://schemas.microsoft.com/office/drawing/2014/main" id="{E2F8D181-AD48-4682-90A7-FAAB36B44FDB}"/>
               </a:ext>
             </a:extLst>
           </p:cNvPr>
@@ -12129,7 +12137,7 @@
           <p:cNvPr id="7" name="">
             <a:extLst xmlns:a="http://schemas.openxmlformats.org/drawingml/2006/main">
               <a:ext uri="{FF2B5EF4-FFF2-40B4-BE49-F238E27FC236}">
-                <a16:creationId xmlns:a16="http://schemas.microsoft.com/office/drawing/2014/main" id="{E33FEFAE-7988-4A83-8BC4-65C611BA46E9}"/>
+                <a16:creationId xmlns:a16="http://schemas.microsoft.com/office/drawing/2014/main" id="{717CA4DD-4E0D-42AD-92AA-D35C60EBD33A}"/>
               </a:ext>
             </a:extLst>
           </p:cNvPr>
@@ -12161,7 +12169,7 @@
           <p:cNvPr id="8" name="">
             <a:extLst xmlns:a="http://schemas.openxmlformats.org/drawingml/2006/main">
               <a:ext uri="{FF2B5EF4-FFF2-40B4-BE49-F238E27FC236}">
-                <a16:creationId xmlns:a16="http://schemas.microsoft.com/office/drawing/2014/main" id="{5A07992B-23F3-4BC0-A4BB-A68C0F80D8A3}"/>
+                <a16:creationId xmlns:a16="http://schemas.microsoft.com/office/drawing/2014/main" id="{72964AA4-5899-4666-86B8-ECE5F63D256E}"/>
               </a:ext>
             </a:extLst>
           </p:cNvPr>
@@ -12218,7 +12226,7 @@
           <p:cNvPr id="9" name="">
             <a:extLst xmlns:a="http://schemas.openxmlformats.org/drawingml/2006/main">
               <a:ext uri="{FF2B5EF4-FFF2-40B4-BE49-F238E27FC236}">
-                <a16:creationId xmlns:a16="http://schemas.microsoft.com/office/drawing/2014/main" id="{848FD3AA-AD61-4217-90DB-D478324D2546}"/>
+                <a16:creationId xmlns:a16="http://schemas.microsoft.com/office/drawing/2014/main" id="{7B390C3D-1A6A-438C-9042-9A9615B5B0DA}"/>
               </a:ext>
             </a:extLst>
           </p:cNvPr>
@@ -12275,7 +12283,7 @@
           <p:cNvPr id="10" name="">
             <a:extLst xmlns:a="http://schemas.openxmlformats.org/drawingml/2006/main">
               <a:ext uri="{FF2B5EF4-FFF2-40B4-BE49-F238E27FC236}">
-                <a16:creationId xmlns:a16="http://schemas.microsoft.com/office/drawing/2014/main" id="{8A572999-99FF-4DED-ABFC-FE7D7B4F5614}"/>
+                <a16:creationId xmlns:a16="http://schemas.microsoft.com/office/drawing/2014/main" id="{72269736-7367-4045-B328-5C50404F35B4}"/>
               </a:ext>
             </a:extLst>
           </p:cNvPr>
@@ -12309,7 +12317,7 @@
           <p:cNvPr id="11" name="">
             <a:extLst xmlns:a="http://schemas.openxmlformats.org/drawingml/2006/main">
               <a:ext uri="{FF2B5EF4-FFF2-40B4-BE49-F238E27FC236}">
-                <a16:creationId xmlns:a16="http://schemas.microsoft.com/office/drawing/2014/main" id="{4DBD995F-4431-4A4E-9133-B0B4102EA831}"/>
+                <a16:creationId xmlns:a16="http://schemas.microsoft.com/office/drawing/2014/main" id="{6F56E7DC-27E5-4508-B9FE-DCEBA0E7BCE1}"/>
               </a:ext>
             </a:extLst>
           </p:cNvPr>
@@ -12341,7 +12349,7 @@
           <p:cNvPr id="12" name="">
             <a:extLst xmlns:a="http://schemas.openxmlformats.org/drawingml/2006/main">
               <a:ext uri="{FF2B5EF4-FFF2-40B4-BE49-F238E27FC236}">
-                <a16:creationId xmlns:a16="http://schemas.microsoft.com/office/drawing/2014/main" id="{445EA642-6FDB-4FC4-B73E-DC42239268B4}"/>
+                <a16:creationId xmlns:a16="http://schemas.microsoft.com/office/drawing/2014/main" id="{F3300B9C-A3FB-4F0F-BF39-B0FF6D27CD64}"/>
               </a:ext>
             </a:extLst>
           </p:cNvPr>
@@ -12398,7 +12406,7 @@
           <p:cNvPr id="13" name="">
             <a:extLst xmlns:a="http://schemas.openxmlformats.org/drawingml/2006/main">
               <a:ext uri="{FF2B5EF4-FFF2-40B4-BE49-F238E27FC236}">
-                <a16:creationId xmlns:a16="http://schemas.microsoft.com/office/drawing/2014/main" id="{CC978D7F-9790-4B4E-A84D-6015DE65996C}"/>
+                <a16:creationId xmlns:a16="http://schemas.microsoft.com/office/drawing/2014/main" id="{8B1EDE4F-22FF-4957-A73C-54E97E2A6F4D}"/>
               </a:ext>
             </a:extLst>
           </p:cNvPr>
@@ -12455,7 +12463,7 @@
           <p:cNvPr id="14" name="">
             <a:extLst xmlns:a="http://schemas.openxmlformats.org/drawingml/2006/main">
               <a:ext uri="{FF2B5EF4-FFF2-40B4-BE49-F238E27FC236}">
-                <a16:creationId xmlns:a16="http://schemas.microsoft.com/office/drawing/2014/main" id="{0660FCDE-535F-4B5B-B5CA-5FAD50CEEEA5}"/>
+                <a16:creationId xmlns:a16="http://schemas.microsoft.com/office/drawing/2014/main" id="{BDD833CE-66BA-48F1-A82D-36927CF7BEF6}"/>
               </a:ext>
             </a:extLst>
           </p:cNvPr>
@@ -12489,7 +12497,7 @@
           <p:cNvPr id="15" name="">
             <a:extLst xmlns:a="http://schemas.openxmlformats.org/drawingml/2006/main">
               <a:ext uri="{FF2B5EF4-FFF2-40B4-BE49-F238E27FC236}">
-                <a16:creationId xmlns:a16="http://schemas.microsoft.com/office/drawing/2014/main" id="{B5CE7D22-C88C-442F-A05F-3087179FBA7F}"/>
+                <a16:creationId xmlns:a16="http://schemas.microsoft.com/office/drawing/2014/main" id="{5AB1E4D6-17C0-42D9-A009-C798F4ADA8D8}"/>
               </a:ext>
             </a:extLst>
           </p:cNvPr>
@@ -12521,7 +12529,7 @@
           <p:cNvPr id="16" name="">
             <a:extLst xmlns:a="http://schemas.openxmlformats.org/drawingml/2006/main">
               <a:ext uri="{FF2B5EF4-FFF2-40B4-BE49-F238E27FC236}">
-                <a16:creationId xmlns:a16="http://schemas.microsoft.com/office/drawing/2014/main" id="{46905441-02B6-42A0-8D83-6B1AD6B91E8D}"/>
+                <a16:creationId xmlns:a16="http://schemas.microsoft.com/office/drawing/2014/main" id="{9AEC7574-1F6E-4AEF-A24B-F06358C8C0C6}"/>
               </a:ext>
             </a:extLst>
           </p:cNvPr>
@@ -12578,7 +12586,7 @@
           <p:cNvPr id="17" name="">
             <a:extLst xmlns:a="http://schemas.openxmlformats.org/drawingml/2006/main">
               <a:ext uri="{FF2B5EF4-FFF2-40B4-BE49-F238E27FC236}">
-                <a16:creationId xmlns:a16="http://schemas.microsoft.com/office/drawing/2014/main" id="{77D5A631-70A3-419E-B338-7F34E4A89B41}"/>
+                <a16:creationId xmlns:a16="http://schemas.microsoft.com/office/drawing/2014/main" id="{564A83BD-0F30-4149-B14F-BD5901577A5E}"/>
               </a:ext>
             </a:extLst>
           </p:cNvPr>
@@ -12635,7 +12643,7 @@
           <p:cNvPr id="18" name="">
             <a:extLst xmlns:a="http://schemas.openxmlformats.org/drawingml/2006/main">
               <a:ext uri="{FF2B5EF4-FFF2-40B4-BE49-F238E27FC236}">
-                <a16:creationId xmlns:a16="http://schemas.microsoft.com/office/drawing/2014/main" id="{CBD56CF9-0836-4F34-9AAF-D3F34B035D5F}"/>
+                <a16:creationId xmlns:a16="http://schemas.microsoft.com/office/drawing/2014/main" id="{7146F22F-3031-4494-A98D-D4EB097C32E0}"/>
               </a:ext>
             </a:extLst>
           </p:cNvPr>
@@ -12669,7 +12677,7 @@
           <p:cNvPr id="19" name="">
             <a:extLst xmlns:a="http://schemas.openxmlformats.org/drawingml/2006/main">
               <a:ext uri="{FF2B5EF4-FFF2-40B4-BE49-F238E27FC236}">
-                <a16:creationId xmlns:a16="http://schemas.microsoft.com/office/drawing/2014/main" id="{738678A2-3EF2-4B2F-847B-F5AC8A75FE4A}"/>
+                <a16:creationId xmlns:a16="http://schemas.microsoft.com/office/drawing/2014/main" id="{0D30A476-31EE-4A1B-A1F6-58592683C527}"/>
               </a:ext>
             </a:extLst>
           </p:cNvPr>
@@ -12701,7 +12709,7 @@
           <p:cNvPr id="20" name="">
             <a:extLst xmlns:a="http://schemas.openxmlformats.org/drawingml/2006/main">
               <a:ext uri="{FF2B5EF4-FFF2-40B4-BE49-F238E27FC236}">
-                <a16:creationId xmlns:a16="http://schemas.microsoft.com/office/drawing/2014/main" id="{1B9A4F15-6F1A-48FD-A1E3-80F043E6C6A3}"/>
+                <a16:creationId xmlns:a16="http://schemas.microsoft.com/office/drawing/2014/main" id="{D9FB6548-B735-4F76-AE4B-DEC7D289AE2E}"/>
               </a:ext>
             </a:extLst>
           </p:cNvPr>
@@ -12758,7 +12766,7 @@
           <p:cNvPr id="21" name="">
             <a:extLst xmlns:a="http://schemas.openxmlformats.org/drawingml/2006/main">
               <a:ext uri="{FF2B5EF4-FFF2-40B4-BE49-F238E27FC236}">
-                <a16:creationId xmlns:a16="http://schemas.microsoft.com/office/drawing/2014/main" id="{C823F540-981E-407E-8B34-B5E8D665D3B6}"/>
+                <a16:creationId xmlns:a16="http://schemas.microsoft.com/office/drawing/2014/main" id="{52E93B50-2C35-482B-B09C-017C510E3C3B}"/>
               </a:ext>
             </a:extLst>
           </p:cNvPr>
@@ -12815,7 +12823,7 @@
           <p:cNvPr id="22" name="">
             <a:extLst xmlns:a="http://schemas.openxmlformats.org/drawingml/2006/main">
               <a:ext uri="{FF2B5EF4-FFF2-40B4-BE49-F238E27FC236}">
-                <a16:creationId xmlns:a16="http://schemas.microsoft.com/office/drawing/2014/main" id="{7C3B4068-E790-4262-8208-C95390FC2731}"/>
+                <a16:creationId xmlns:a16="http://schemas.microsoft.com/office/drawing/2014/main" id="{5A17528B-0CF0-4E57-8CFB-01670B675240}"/>
               </a:ext>
             </a:extLst>
           </p:cNvPr>
@@ -12870,7 +12878,7 @@
     </p:spTree>
     <p:extLst>
       <p:ext uri="{BB962C8B-B14F-4D97-AF65-F5344CB8AC3E}">
-        <p14:creationId xmlns:p14="http://schemas.microsoft.com/office/powerpoint/2010/main" val="795971424"/>
+        <p14:creationId xmlns:p14="http://schemas.microsoft.com/office/powerpoint/2010/main" val="1300394401"/>
       </p:ext>
     </p:extLst>
   </p:cSld>
@@ -13071,7 +13079,7 @@
           <p:cNvPr id="22" name="">
             <a:extLst xmlns:a="http://schemas.openxmlformats.org/drawingml/2006/main">
               <a:ext uri="{FF2B5EF4-FFF2-40B4-BE49-F238E27FC236}">
-                <a16:creationId xmlns:a16="http://schemas.microsoft.com/office/drawing/2014/main" id="{FF09A892-ADC9-4D9A-B222-A9CDD914B63F}"/>
+                <a16:creationId xmlns:a16="http://schemas.microsoft.com/office/drawing/2014/main" id="{A6E55097-ECF1-4F61-870A-BF209E46C0C0}"/>
               </a:ext>
             </a:extLst>
           </p:cNvPr>
@@ -13103,7 +13111,7 @@
           <p:cNvPr id="2" name="">
             <a:extLst xmlns:a="http://schemas.openxmlformats.org/drawingml/2006/main">
               <a:ext uri="{FF2B5EF4-FFF2-40B4-BE49-F238E27FC236}">
-                <a16:creationId xmlns:a16="http://schemas.microsoft.com/office/drawing/2014/main" id="{9026BED5-1A54-46BA-8353-694CEAA1C7C2}"/>
+                <a16:creationId xmlns:a16="http://schemas.microsoft.com/office/drawing/2014/main" id="{994B067B-1C8D-4988-A262-27E064614CF1}"/>
               </a:ext>
             </a:extLst>
           </p:cNvPr>
@@ -13160,7 +13168,7 @@
           <p:cNvPr id="3" name="">
             <a:extLst xmlns:a="http://schemas.openxmlformats.org/drawingml/2006/main">
               <a:ext uri="{FF2B5EF4-FFF2-40B4-BE49-F238E27FC236}">
-                <a16:creationId xmlns:a16="http://schemas.microsoft.com/office/drawing/2014/main" id="{DB1ED81C-A127-4CB0-92C1-46496129F117}"/>
+                <a16:creationId xmlns:a16="http://schemas.microsoft.com/office/drawing/2014/main" id="{E0E1698B-35F7-40A8-9A74-D8D4F5E2C4FD}"/>
               </a:ext>
             </a:extLst>
           </p:cNvPr>
@@ -13192,7 +13200,7 @@
           <p:cNvPr id="4" name="">
             <a:extLst xmlns:a="http://schemas.openxmlformats.org/drawingml/2006/main">
               <a:ext uri="{FF2B5EF4-FFF2-40B4-BE49-F238E27FC236}">
-                <a16:creationId xmlns:a16="http://schemas.microsoft.com/office/drawing/2014/main" id="{8C41B42F-DBA8-42CD-8CA4-1D79F486AE72}"/>
+                <a16:creationId xmlns:a16="http://schemas.microsoft.com/office/drawing/2014/main" id="{F1872AAB-6209-403B-B386-7EDEF9A1B2A7}"/>
               </a:ext>
             </a:extLst>
           </p:cNvPr>
@@ -13249,7 +13257,7 @@
           <p:cNvPr id="5" name="">
             <a:extLst xmlns:a="http://schemas.openxmlformats.org/drawingml/2006/main">
               <a:ext uri="{FF2B5EF4-FFF2-40B4-BE49-F238E27FC236}">
-                <a16:creationId xmlns:a16="http://schemas.microsoft.com/office/drawing/2014/main" id="{550C575A-17BA-46A8-AF33-8353D722C01E}"/>
+                <a16:creationId xmlns:a16="http://schemas.microsoft.com/office/drawing/2014/main" id="{2C984072-C03C-47E0-AEB5-F2FB8445C16E}"/>
               </a:ext>
             </a:extLst>
           </p:cNvPr>
@@ -13306,7 +13314,7 @@
           <p:cNvPr id="6" name="">
             <a:extLst xmlns:a="http://schemas.openxmlformats.org/drawingml/2006/main">
               <a:ext uri="{FF2B5EF4-FFF2-40B4-BE49-F238E27FC236}">
-                <a16:creationId xmlns:a16="http://schemas.microsoft.com/office/drawing/2014/main" id="{2A6B3C36-5CF7-4704-9AFD-C084818CB148}"/>
+                <a16:creationId xmlns:a16="http://schemas.microsoft.com/office/drawing/2014/main" id="{446231E7-8DB4-4FA0-A55E-F90EC5D1DA0B}"/>
               </a:ext>
             </a:extLst>
           </p:cNvPr>
@@ -13363,7 +13371,7 @@
           <p:cNvPr id="7" name="">
             <a:extLst xmlns:a="http://schemas.openxmlformats.org/drawingml/2006/main">
               <a:ext uri="{FF2B5EF4-FFF2-40B4-BE49-F238E27FC236}">
-                <a16:creationId xmlns:a16="http://schemas.microsoft.com/office/drawing/2014/main" id="{4D1305B6-D8B1-4B6F-B2DD-963AED11030A}"/>
+                <a16:creationId xmlns:a16="http://schemas.microsoft.com/office/drawing/2014/main" id="{9286C833-8DBE-497B-97BC-98F5D27C86F5}"/>
               </a:ext>
             </a:extLst>
           </p:cNvPr>
@@ -13395,7 +13403,7 @@
           <p:cNvPr id="8" name="">
             <a:extLst xmlns:a="http://schemas.openxmlformats.org/drawingml/2006/main">
               <a:ext uri="{FF2B5EF4-FFF2-40B4-BE49-F238E27FC236}">
-                <a16:creationId xmlns:a16="http://schemas.microsoft.com/office/drawing/2014/main" id="{35B890AD-B4C7-4F1A-8795-5A04361385FB}"/>
+                <a16:creationId xmlns:a16="http://schemas.microsoft.com/office/drawing/2014/main" id="{21C6A7B4-2281-4ECD-9CC5-E37A97CD4B2B}"/>
               </a:ext>
             </a:extLst>
           </p:cNvPr>
@@ -13452,7 +13460,7 @@
           <p:cNvPr id="9" name="">
             <a:extLst xmlns:a="http://schemas.openxmlformats.org/drawingml/2006/main">
               <a:ext uri="{FF2B5EF4-FFF2-40B4-BE49-F238E27FC236}">
-                <a16:creationId xmlns:a16="http://schemas.microsoft.com/office/drawing/2014/main" id="{11FB9354-2604-4105-B05C-97DA6973D9FD}"/>
+                <a16:creationId xmlns:a16="http://schemas.microsoft.com/office/drawing/2014/main" id="{EEC89062-1924-433A-8FB2-849E6F0E601B}"/>
               </a:ext>
             </a:extLst>
           </p:cNvPr>
@@ -13509,7 +13517,7 @@
           <p:cNvPr id="10" name="">
             <a:extLst xmlns:a="http://schemas.openxmlformats.org/drawingml/2006/main">
               <a:ext uri="{FF2B5EF4-FFF2-40B4-BE49-F238E27FC236}">
-                <a16:creationId xmlns:a16="http://schemas.microsoft.com/office/drawing/2014/main" id="{20AD5494-AD3A-482D-8426-282FE8F789E9}"/>
+                <a16:creationId xmlns:a16="http://schemas.microsoft.com/office/drawing/2014/main" id="{7D7BFA37-383B-4EDC-8A5E-8E7AC8627C48}"/>
               </a:ext>
             </a:extLst>
           </p:cNvPr>
@@ -13543,7 +13551,7 @@
           <p:cNvPr id="11" name="">
             <a:extLst xmlns:a="http://schemas.openxmlformats.org/drawingml/2006/main">
               <a:ext uri="{FF2B5EF4-FFF2-40B4-BE49-F238E27FC236}">
-                <a16:creationId xmlns:a16="http://schemas.microsoft.com/office/drawing/2014/main" id="{B7C8583E-A617-4AD6-ADAD-C97706B8E91B}"/>
+                <a16:creationId xmlns:a16="http://schemas.microsoft.com/office/drawing/2014/main" id="{09A14B24-9B69-4DC8-881E-CCFCA64FCA6A}"/>
               </a:ext>
             </a:extLst>
           </p:cNvPr>
@@ -13575,7 +13583,7 @@
           <p:cNvPr id="12" name="">
             <a:extLst xmlns:a="http://schemas.openxmlformats.org/drawingml/2006/main">
               <a:ext uri="{FF2B5EF4-FFF2-40B4-BE49-F238E27FC236}">
-                <a16:creationId xmlns:a16="http://schemas.microsoft.com/office/drawing/2014/main" id="{E983F20B-9F30-4198-831A-15398991EED0}"/>
+                <a16:creationId xmlns:a16="http://schemas.microsoft.com/office/drawing/2014/main" id="{2F645076-18D1-42FC-AD15-6217A61AE2F3}"/>
               </a:ext>
             </a:extLst>
           </p:cNvPr>
@@ -13632,7 +13640,7 @@
           <p:cNvPr id="13" name="">
             <a:extLst xmlns:a="http://schemas.openxmlformats.org/drawingml/2006/main">
               <a:ext uri="{FF2B5EF4-FFF2-40B4-BE49-F238E27FC236}">
-                <a16:creationId xmlns:a16="http://schemas.microsoft.com/office/drawing/2014/main" id="{19FE60FF-DC79-4BA3-B731-3D27EB62DFB0}"/>
+                <a16:creationId xmlns:a16="http://schemas.microsoft.com/office/drawing/2014/main" id="{9B14F688-F69D-43B8-BEC0-89CF291043E4}"/>
               </a:ext>
             </a:extLst>
           </p:cNvPr>
@@ -13689,7 +13697,7 @@
           <p:cNvPr id="14" name="">
             <a:extLst xmlns:a="http://schemas.openxmlformats.org/drawingml/2006/main">
               <a:ext uri="{FF2B5EF4-FFF2-40B4-BE49-F238E27FC236}">
-                <a16:creationId xmlns:a16="http://schemas.microsoft.com/office/drawing/2014/main" id="{F2A48325-0327-4695-9480-0396E26A32C9}"/>
+                <a16:creationId xmlns:a16="http://schemas.microsoft.com/office/drawing/2014/main" id="{B04C0A71-E06B-4414-A3CF-621A73666C51}"/>
               </a:ext>
             </a:extLst>
           </p:cNvPr>
@@ -13723,7 +13731,7 @@
           <p:cNvPr id="15" name="">
             <a:extLst xmlns:a="http://schemas.openxmlformats.org/drawingml/2006/main">
               <a:ext uri="{FF2B5EF4-FFF2-40B4-BE49-F238E27FC236}">
-                <a16:creationId xmlns:a16="http://schemas.microsoft.com/office/drawing/2014/main" id="{39DA7A32-CD2B-41F1-9E09-E286C41963AD}"/>
+                <a16:creationId xmlns:a16="http://schemas.microsoft.com/office/drawing/2014/main" id="{1E05DCC9-0486-4335-BB65-F003FA4AFB27}"/>
               </a:ext>
             </a:extLst>
           </p:cNvPr>
@@ -13755,7 +13763,7 @@
           <p:cNvPr id="16" name="">
             <a:extLst xmlns:a="http://schemas.openxmlformats.org/drawingml/2006/main">
               <a:ext uri="{FF2B5EF4-FFF2-40B4-BE49-F238E27FC236}">
-                <a16:creationId xmlns:a16="http://schemas.microsoft.com/office/drawing/2014/main" id="{68736056-6875-4F56-8C1C-20EBF9E6D6CC}"/>
+                <a16:creationId xmlns:a16="http://schemas.microsoft.com/office/drawing/2014/main" id="{6258519C-347E-41CB-A79F-76A5836D87C6}"/>
               </a:ext>
             </a:extLst>
           </p:cNvPr>
@@ -13812,7 +13820,7 @@
           <p:cNvPr id="17" name="">
             <a:extLst xmlns:a="http://schemas.openxmlformats.org/drawingml/2006/main">
               <a:ext uri="{FF2B5EF4-FFF2-40B4-BE49-F238E27FC236}">
-                <a16:creationId xmlns:a16="http://schemas.microsoft.com/office/drawing/2014/main" id="{2132994F-40EE-4612-AE5D-6E16DE5EFF91}"/>
+                <a16:creationId xmlns:a16="http://schemas.microsoft.com/office/drawing/2014/main" id="{4DAA79C8-F500-4DCE-B7E1-338AE36565BD}"/>
               </a:ext>
             </a:extLst>
           </p:cNvPr>
@@ -13869,7 +13877,7 @@
           <p:cNvPr id="18" name="">
             <a:extLst xmlns:a="http://schemas.openxmlformats.org/drawingml/2006/main">
               <a:ext uri="{FF2B5EF4-FFF2-40B4-BE49-F238E27FC236}">
-                <a16:creationId xmlns:a16="http://schemas.microsoft.com/office/drawing/2014/main" id="{60DDBFE1-23C7-4368-9632-2AC9AF236E12}"/>
+                <a16:creationId xmlns:a16="http://schemas.microsoft.com/office/drawing/2014/main" id="{7BE1E68B-A248-4A0A-A5FE-7F29829B8BF7}"/>
               </a:ext>
             </a:extLst>
           </p:cNvPr>
@@ -13903,7 +13911,7 @@
           <p:cNvPr id="19" name="">
             <a:extLst xmlns:a="http://schemas.openxmlformats.org/drawingml/2006/main">
               <a:ext uri="{FF2B5EF4-FFF2-40B4-BE49-F238E27FC236}">
-                <a16:creationId xmlns:a16="http://schemas.microsoft.com/office/drawing/2014/main" id="{33083A93-90A0-4D59-A592-60AD2AF00CC4}"/>
+                <a16:creationId xmlns:a16="http://schemas.microsoft.com/office/drawing/2014/main" id="{61A15790-B16F-43D5-897E-8AEF826C08BC}"/>
               </a:ext>
             </a:extLst>
           </p:cNvPr>
@@ -13935,7 +13943,7 @@
           <p:cNvPr id="20" name="">
             <a:extLst xmlns:a="http://schemas.openxmlformats.org/drawingml/2006/main">
               <a:ext uri="{FF2B5EF4-FFF2-40B4-BE49-F238E27FC236}">
-                <a16:creationId xmlns:a16="http://schemas.microsoft.com/office/drawing/2014/main" id="{DB29E542-E04A-4FF7-BE15-E0C0CF0FC50E}"/>
+                <a16:creationId xmlns:a16="http://schemas.microsoft.com/office/drawing/2014/main" id="{4D266BBD-1AD5-468A-BBF8-7CCA433767DB}"/>
               </a:ext>
             </a:extLst>
           </p:cNvPr>
@@ -13992,7 +14000,7 @@
           <p:cNvPr id="21" name="">
             <a:extLst xmlns:a="http://schemas.openxmlformats.org/drawingml/2006/main">
               <a:ext uri="{FF2B5EF4-FFF2-40B4-BE49-F238E27FC236}">
-                <a16:creationId xmlns:a16="http://schemas.microsoft.com/office/drawing/2014/main" id="{9D3930FE-5307-4305-AEAE-0DE346251035}"/>
+                <a16:creationId xmlns:a16="http://schemas.microsoft.com/office/drawing/2014/main" id="{953D0F80-3E95-4A34-A345-2CACE6EA25F4}"/>
               </a:ext>
             </a:extLst>
           </p:cNvPr>
@@ -14047,7 +14055,7 @@
     </p:spTree>
     <p:extLst>
       <p:ext uri="{BB962C8B-B14F-4D97-AF65-F5344CB8AC3E}">
-        <p14:creationId xmlns:p14="http://schemas.microsoft.com/office/powerpoint/2010/main" val="626879487"/>
+        <p14:creationId xmlns:p14="http://schemas.microsoft.com/office/powerpoint/2010/main" val="1480590304"/>
       </p:ext>
     </p:extLst>
   </p:cSld>
